--- a/projects/cns-pharmacology-practical/slides/ch04-depression.pptx
+++ b/projects/cns-pharmacology-practical/slides/ch04-depression.pptx
@@ -7049,7 +7049,7 @@
                 </a:solidFill>
                 <a:latin typeface="Calibri"/>
               </a:rPr>
-              <a:t>45 minutes  ·  10 questions</a:t>
+              <a:t>60 minutes  ·  10 questions</a:t>
             </a:r>
           </a:p>
         </p:txBody>
@@ -12171,7 +12171,7 @@
                 </a:solidFill>
                 <a:latin typeface="Cambria"/>
               </a:rPr>
-              <a:t>45</a:t>
+              <a:t>60</a:t>
             </a:r>
           </a:p>
           <a:p>

--- a/projects/cns-pharmacology-practical/slides/ch04-depression.pptx
+++ b/projects/cns-pharmacology-practical/slides/ch04-depression.pptx
@@ -5961,9 +5961,113 @@
           </a:prstGeom>
         </p:spPr>
       </p:pic>
+      <p:sp>
+        <p:nvSpPr>
+          <p:cNvPr id="11" name="Rounded Rectangle 10"/>
+          <p:cNvSpPr/>
+          <p:nvPr/>
+        </p:nvSpPr>
+        <p:spPr>
+          <a:xfrm>
+            <a:off x="411479" y="1444752"/>
+            <a:ext cx="11368735" cy="4800600"/>
+          </a:xfrm>
+          <a:prstGeom prst="roundRect">
+            <a:avLst>
+              <a:gd name="adj" fmla="val 4000"/>
+            </a:avLst>
+          </a:prstGeom>
+          <a:solidFill>
+            <a:srgbClr val="FFFFFF">
+              <a:alpha val="84000"/>
+            </a:srgbClr>
+          </a:solidFill>
+          <a:ln w="19050">
+            <a:solidFill>
+              <a:srgbClr val="FFFFFF"/>
+            </a:solidFill>
+          </a:ln>
+          <a:effectLst>
+            <a:outerShdw blurRad="203200" dist="50800" dir="5400000" algn="t" rotWithShape="0">
+              <a:srgbClr val="1A2340">
+                <a:alpha val="20000"/>
+              </a:srgbClr>
+            </a:outerShdw>
+          </a:effectLst>
+        </p:spPr>
+        <p:style>
+          <a:lnRef idx="1">
+            <a:schemeClr val="accent1"/>
+          </a:lnRef>
+          <a:fillRef idx="3">
+            <a:schemeClr val="accent1"/>
+          </a:fillRef>
+          <a:effectRef idx="2">
+            <a:schemeClr val="accent1"/>
+          </a:effectRef>
+          <a:fontRef idx="minor">
+            <a:schemeClr val="lt1"/>
+          </a:fontRef>
+        </p:style>
+        <p:txBody>
+          <a:bodyPr rtlCol="0" anchor="ctr"/>
+          <a:lstStyle/>
+          <a:p>
+            <a:pPr algn="ctr"/>
+          </a:p>
+        </p:txBody>
+      </p:sp>
+      <p:sp>
+        <p:nvSpPr>
+          <p:cNvPr id="12" name="Rounded Rectangle 11"/>
+          <p:cNvSpPr/>
+          <p:nvPr/>
+        </p:nvSpPr>
+        <p:spPr>
+          <a:xfrm>
+            <a:off x="731519" y="1508760"/>
+            <a:ext cx="10728655" cy="32004"/>
+          </a:xfrm>
+          <a:prstGeom prst="roundRect">
+            <a:avLst>
+              <a:gd name="adj" fmla="val 50000"/>
+            </a:avLst>
+          </a:prstGeom>
+          <a:solidFill>
+            <a:srgbClr val="FFFFFF">
+              <a:alpha val="85000"/>
+            </a:srgbClr>
+          </a:solidFill>
+          <a:ln>
+            <a:noFill/>
+          </a:ln>
+          <a:effectLst/>
+        </p:spPr>
+        <p:style>
+          <a:lnRef idx="1">
+            <a:schemeClr val="accent1"/>
+          </a:lnRef>
+          <a:fillRef idx="3">
+            <a:schemeClr val="accent1"/>
+          </a:fillRef>
+          <a:effectRef idx="2">
+            <a:schemeClr val="accent1"/>
+          </a:effectRef>
+          <a:fontRef idx="minor">
+            <a:schemeClr val="lt1"/>
+          </a:fontRef>
+        </p:style>
+        <p:txBody>
+          <a:bodyPr rtlCol="0" anchor="ctr"/>
+          <a:lstStyle/>
+          <a:p>
+            <a:pPr algn="ctr"/>
+          </a:p>
+        </p:txBody>
+      </p:sp>
       <p:graphicFrame>
         <p:nvGraphicFramePr>
-          <p:cNvPr id="11" name="Table 10"/>
+          <p:cNvPr id="13" name="Table 12"/>
           <p:cNvGraphicFramePr>
             <a:graphicFrameLocks noGrp="1"/>
           </p:cNvGraphicFramePr>
@@ -6448,6 +6552,110 @@
       </p:pic>
       <p:sp>
         <p:nvSpPr>
+          <p:cNvPr id="10" name="Rounded Rectangle 9"/>
+          <p:cNvSpPr/>
+          <p:nvPr/>
+        </p:nvSpPr>
+        <p:spPr>
+          <a:xfrm>
+            <a:off x="4251960" y="548640"/>
+            <a:ext cx="7635240" cy="5715000"/>
+          </a:xfrm>
+          <a:prstGeom prst="roundRect">
+            <a:avLst>
+              <a:gd name="adj" fmla="val 4000"/>
+            </a:avLst>
+          </a:prstGeom>
+          <a:solidFill>
+            <a:srgbClr val="FFFFFF">
+              <a:alpha val="84000"/>
+            </a:srgbClr>
+          </a:solidFill>
+          <a:ln w="19050">
+            <a:solidFill>
+              <a:srgbClr val="FFFFFF"/>
+            </a:solidFill>
+          </a:ln>
+          <a:effectLst>
+            <a:outerShdw blurRad="203200" dist="50800" dir="5400000" algn="t" rotWithShape="0">
+              <a:srgbClr val="1A2340">
+                <a:alpha val="20000"/>
+              </a:srgbClr>
+            </a:outerShdw>
+          </a:effectLst>
+        </p:spPr>
+        <p:style>
+          <a:lnRef idx="1">
+            <a:schemeClr val="accent1"/>
+          </a:lnRef>
+          <a:fillRef idx="3">
+            <a:schemeClr val="accent1"/>
+          </a:fillRef>
+          <a:effectRef idx="2">
+            <a:schemeClr val="accent1"/>
+          </a:effectRef>
+          <a:fontRef idx="minor">
+            <a:schemeClr val="lt1"/>
+          </a:fontRef>
+        </p:style>
+        <p:txBody>
+          <a:bodyPr rtlCol="0" anchor="ctr"/>
+          <a:lstStyle/>
+          <a:p>
+            <a:pPr algn="ctr"/>
+          </a:p>
+        </p:txBody>
+      </p:sp>
+      <p:sp>
+        <p:nvSpPr>
+          <p:cNvPr id="11" name="Rounded Rectangle 10"/>
+          <p:cNvSpPr/>
+          <p:nvPr/>
+        </p:nvSpPr>
+        <p:spPr>
+          <a:xfrm>
+            <a:off x="4572000" y="612647"/>
+            <a:ext cx="6995159" cy="32004"/>
+          </a:xfrm>
+          <a:prstGeom prst="roundRect">
+            <a:avLst>
+              <a:gd name="adj" fmla="val 50000"/>
+            </a:avLst>
+          </a:prstGeom>
+          <a:solidFill>
+            <a:srgbClr val="FFFFFF">
+              <a:alpha val="85000"/>
+            </a:srgbClr>
+          </a:solidFill>
+          <a:ln>
+            <a:noFill/>
+          </a:ln>
+          <a:effectLst/>
+        </p:spPr>
+        <p:style>
+          <a:lnRef idx="1">
+            <a:schemeClr val="accent1"/>
+          </a:lnRef>
+          <a:fillRef idx="3">
+            <a:schemeClr val="accent1"/>
+          </a:fillRef>
+          <a:effectRef idx="2">
+            <a:schemeClr val="accent1"/>
+          </a:effectRef>
+          <a:fontRef idx="minor">
+            <a:schemeClr val="lt1"/>
+          </a:fontRef>
+        </p:style>
+        <p:txBody>
+          <a:bodyPr rtlCol="0" anchor="ctr"/>
+          <a:lstStyle/>
+          <a:p>
+            <a:pPr algn="ctr"/>
+          </a:p>
+        </p:txBody>
+      </p:sp>
+      <p:sp>
+        <p:nvSpPr>
           <p:cNvPr id="3" name="Rectangle 2"/>
           <p:cNvSpPr/>
           <p:nvPr/>
@@ -7102,14 +7310,177 @@
       </p:pic>
       <p:sp>
         <p:nvSpPr>
-          <p:cNvPr id="11" name="TextBox 10"/>
+          <p:cNvPr id="11" name="Rounded Rectangle 10"/>
+          <p:cNvSpPr/>
+          <p:nvPr/>
+        </p:nvSpPr>
+        <p:spPr>
+          <a:xfrm>
+            <a:off x="411479" y="1444752"/>
+            <a:ext cx="11368735" cy="4800600"/>
+          </a:xfrm>
+          <a:prstGeom prst="roundRect">
+            <a:avLst>
+              <a:gd name="adj" fmla="val 4000"/>
+            </a:avLst>
+          </a:prstGeom>
+          <a:solidFill>
+            <a:srgbClr val="FFFFFF">
+              <a:alpha val="84000"/>
+            </a:srgbClr>
+          </a:solidFill>
+          <a:ln w="19050">
+            <a:solidFill>
+              <a:srgbClr val="FFFFFF"/>
+            </a:solidFill>
+          </a:ln>
+          <a:effectLst>
+            <a:outerShdw blurRad="203200" dist="50800" dir="5400000" algn="t" rotWithShape="0">
+              <a:srgbClr val="1A2340">
+                <a:alpha val="20000"/>
+              </a:srgbClr>
+            </a:outerShdw>
+          </a:effectLst>
+        </p:spPr>
+        <p:style>
+          <a:lnRef idx="1">
+            <a:schemeClr val="accent1"/>
+          </a:lnRef>
+          <a:fillRef idx="3">
+            <a:schemeClr val="accent1"/>
+          </a:fillRef>
+          <a:effectRef idx="2">
+            <a:schemeClr val="accent1"/>
+          </a:effectRef>
+          <a:fontRef idx="minor">
+            <a:schemeClr val="lt1"/>
+          </a:fontRef>
+        </p:style>
+        <p:txBody>
+          <a:bodyPr rtlCol="0" anchor="ctr"/>
+          <a:lstStyle/>
+          <a:p>
+            <a:pPr algn="ctr"/>
+          </a:p>
+        </p:txBody>
+      </p:sp>
+      <p:sp>
+        <p:nvSpPr>
+          <p:cNvPr id="12" name="Rounded Rectangle 11"/>
+          <p:cNvSpPr/>
+          <p:nvPr/>
+        </p:nvSpPr>
+        <p:spPr>
+          <a:xfrm>
+            <a:off x="731519" y="1508760"/>
+            <a:ext cx="10728655" cy="32004"/>
+          </a:xfrm>
+          <a:prstGeom prst="roundRect">
+            <a:avLst>
+              <a:gd name="adj" fmla="val 50000"/>
+            </a:avLst>
+          </a:prstGeom>
+          <a:solidFill>
+            <a:srgbClr val="FFFFFF">
+              <a:alpha val="85000"/>
+            </a:srgbClr>
+          </a:solidFill>
+          <a:ln>
+            <a:noFill/>
+          </a:ln>
+          <a:effectLst/>
+        </p:spPr>
+        <p:style>
+          <a:lnRef idx="1">
+            <a:schemeClr val="accent1"/>
+          </a:lnRef>
+          <a:fillRef idx="3">
+            <a:schemeClr val="accent1"/>
+          </a:fillRef>
+          <a:effectRef idx="2">
+            <a:schemeClr val="accent1"/>
+          </a:effectRef>
+          <a:fontRef idx="minor">
+            <a:schemeClr val="lt1"/>
+          </a:fontRef>
+        </p:style>
+        <p:txBody>
+          <a:bodyPr rtlCol="0" anchor="ctr"/>
+          <a:lstStyle/>
+          <a:p>
+            <a:pPr algn="ctr"/>
+          </a:p>
+        </p:txBody>
+      </p:sp>
+      <p:sp>
+        <p:nvSpPr>
+          <p:cNvPr id="13" name="Rounded Rectangle 12"/>
+          <p:cNvSpPr/>
+          <p:nvPr/>
+        </p:nvSpPr>
+        <p:spPr>
+          <a:xfrm>
+            <a:off x="548640" y="1591056"/>
+            <a:ext cx="64008" cy="594360"/>
+          </a:xfrm>
+          <a:prstGeom prst="roundRect">
+            <a:avLst>
+              <a:gd name="adj" fmla="val 50000"/>
+            </a:avLst>
+          </a:prstGeom>
+          <a:solidFill>
+            <a:srgbClr val="8D6A2A"/>
+          </a:solidFill>
+          <a:ln>
+            <a:noFill/>
+          </a:ln>
+          <a:effectLst>
+            <a:outerShdw blurRad="203200" dist="50800" dir="5400000" algn="t" rotWithShape="0">
+              <a:srgbClr val="1A2340">
+                <a:alpha val="20000"/>
+              </a:srgbClr>
+            </a:outerShdw>
+          </a:effectLst>
+          <a:scene3d>
+            <a:camera prst="orthographicFront"/>
+            <a:lightRig rig="threePt" dir="t"/>
+          </a:scene3d>
+          <a:sp3d>
+            <a:bevelT w="44450" h="25400" prst="softRound"/>
+          </a:sp3d>
+        </p:spPr>
+        <p:style>
+          <a:lnRef idx="1">
+            <a:schemeClr val="accent1"/>
+          </a:lnRef>
+          <a:fillRef idx="3">
+            <a:schemeClr val="accent1"/>
+          </a:fillRef>
+          <a:effectRef idx="2">
+            <a:schemeClr val="accent1"/>
+          </a:effectRef>
+          <a:fontRef idx="minor">
+            <a:schemeClr val="lt1"/>
+          </a:fontRef>
+        </p:style>
+        <p:txBody>
+          <a:bodyPr rtlCol="0" anchor="ctr"/>
+          <a:lstStyle/>
+          <a:p>
+            <a:pPr algn="ctr"/>
+          </a:p>
+        </p:txBody>
+      </p:sp>
+      <p:sp>
+        <p:nvSpPr>
+          <p:cNvPr id="14" name="TextBox 13"/>
           <p:cNvSpPr txBox="1"/>
           <p:nvPr/>
         </p:nvSpPr>
         <p:spPr>
           <a:xfrm>
-            <a:off x="548640" y="1554480"/>
-            <a:ext cx="11094415" cy="795528"/>
+            <a:off x="777240" y="1554480"/>
+            <a:ext cx="10865815" cy="795528"/>
           </a:xfrm>
           <a:prstGeom prst="rect">
             <a:avLst/>
@@ -7141,7 +7512,7 @@
       </p:sp>
       <p:sp>
         <p:nvSpPr>
-          <p:cNvPr id="12" name="Oval 11"/>
+          <p:cNvPr id="15" name="Oval 14"/>
           <p:cNvSpPr/>
           <p:nvPr/>
         </p:nvSpPr>
@@ -7194,7 +7565,7 @@
       </p:sp>
       <p:sp>
         <p:nvSpPr>
-          <p:cNvPr id="13" name="TextBox 12"/>
+          <p:cNvPr id="16" name="TextBox 15"/>
           <p:cNvSpPr txBox="1"/>
           <p:nvPr/>
         </p:nvSpPr>
@@ -7237,7 +7608,7 @@
       </p:sp>
       <p:sp>
         <p:nvSpPr>
-          <p:cNvPr id="14" name="Oval 13"/>
+          <p:cNvPr id="17" name="Oval 16"/>
           <p:cNvSpPr/>
           <p:nvPr/>
         </p:nvSpPr>
@@ -7290,7 +7661,7 @@
       </p:sp>
       <p:sp>
         <p:nvSpPr>
-          <p:cNvPr id="15" name="TextBox 14"/>
+          <p:cNvPr id="18" name="TextBox 17"/>
           <p:cNvSpPr txBox="1"/>
           <p:nvPr/>
         </p:nvSpPr>
@@ -7333,7 +7704,7 @@
       </p:sp>
       <p:sp>
         <p:nvSpPr>
-          <p:cNvPr id="16" name="Oval 15"/>
+          <p:cNvPr id="19" name="Oval 18"/>
           <p:cNvSpPr/>
           <p:nvPr/>
         </p:nvSpPr>
@@ -7386,7 +7757,7 @@
       </p:sp>
       <p:sp>
         <p:nvSpPr>
-          <p:cNvPr id="17" name="TextBox 16"/>
+          <p:cNvPr id="20" name="TextBox 19"/>
           <p:cNvSpPr txBox="1"/>
           <p:nvPr/>
         </p:nvSpPr>
@@ -7816,6 +8187,110 @@
         </p:nvSpPr>
         <p:spPr>
           <a:xfrm>
+            <a:off x="411479" y="1444752"/>
+            <a:ext cx="11368735" cy="4800600"/>
+          </a:xfrm>
+          <a:prstGeom prst="roundRect">
+            <a:avLst>
+              <a:gd name="adj" fmla="val 4000"/>
+            </a:avLst>
+          </a:prstGeom>
+          <a:solidFill>
+            <a:srgbClr val="FFFFFF">
+              <a:alpha val="84000"/>
+            </a:srgbClr>
+          </a:solidFill>
+          <a:ln w="19050">
+            <a:solidFill>
+              <a:srgbClr val="FFFFFF"/>
+            </a:solidFill>
+          </a:ln>
+          <a:effectLst>
+            <a:outerShdw blurRad="203200" dist="50800" dir="5400000" algn="t" rotWithShape="0">
+              <a:srgbClr val="1A2340">
+                <a:alpha val="20000"/>
+              </a:srgbClr>
+            </a:outerShdw>
+          </a:effectLst>
+        </p:spPr>
+        <p:style>
+          <a:lnRef idx="1">
+            <a:schemeClr val="accent1"/>
+          </a:lnRef>
+          <a:fillRef idx="3">
+            <a:schemeClr val="accent1"/>
+          </a:fillRef>
+          <a:effectRef idx="2">
+            <a:schemeClr val="accent1"/>
+          </a:effectRef>
+          <a:fontRef idx="minor">
+            <a:schemeClr val="lt1"/>
+          </a:fontRef>
+        </p:style>
+        <p:txBody>
+          <a:bodyPr rtlCol="0" anchor="ctr"/>
+          <a:lstStyle/>
+          <a:p>
+            <a:pPr algn="ctr"/>
+          </a:p>
+        </p:txBody>
+      </p:sp>
+      <p:sp>
+        <p:nvSpPr>
+          <p:cNvPr id="12" name="Rounded Rectangle 11"/>
+          <p:cNvSpPr/>
+          <p:nvPr/>
+        </p:nvSpPr>
+        <p:spPr>
+          <a:xfrm>
+            <a:off x="731519" y="1508760"/>
+            <a:ext cx="10728655" cy="32004"/>
+          </a:xfrm>
+          <a:prstGeom prst="roundRect">
+            <a:avLst>
+              <a:gd name="adj" fmla="val 50000"/>
+            </a:avLst>
+          </a:prstGeom>
+          <a:solidFill>
+            <a:srgbClr val="FFFFFF">
+              <a:alpha val="85000"/>
+            </a:srgbClr>
+          </a:solidFill>
+          <a:ln>
+            <a:noFill/>
+          </a:ln>
+          <a:effectLst/>
+        </p:spPr>
+        <p:style>
+          <a:lnRef idx="1">
+            <a:schemeClr val="accent1"/>
+          </a:lnRef>
+          <a:fillRef idx="3">
+            <a:schemeClr val="accent1"/>
+          </a:fillRef>
+          <a:effectRef idx="2">
+            <a:schemeClr val="accent1"/>
+          </a:effectRef>
+          <a:fontRef idx="minor">
+            <a:schemeClr val="lt1"/>
+          </a:fontRef>
+        </p:style>
+        <p:txBody>
+          <a:bodyPr rtlCol="0" anchor="ctr"/>
+          <a:lstStyle/>
+          <a:p>
+            <a:pPr algn="ctr"/>
+          </a:p>
+        </p:txBody>
+      </p:sp>
+      <p:sp>
+        <p:nvSpPr>
+          <p:cNvPr id="13" name="Rounded Rectangle 12"/>
+          <p:cNvSpPr/>
+          <p:nvPr/>
+        </p:nvSpPr>
+        <p:spPr>
+          <a:xfrm>
             <a:off x="1645919" y="2103120"/>
             <a:ext cx="8899855" cy="2794508"/>
           </a:xfrm>
@@ -7866,7 +8341,7 @@
       </p:sp>
       <p:sp>
         <p:nvSpPr>
-          <p:cNvPr id="12" name="Rounded Rectangle 11"/>
+          <p:cNvPr id="14" name="Rounded Rectangle 13"/>
           <p:cNvSpPr/>
           <p:nvPr/>
         </p:nvSpPr>
@@ -7914,7 +8389,7 @@
       </p:sp>
       <p:sp>
         <p:nvSpPr>
-          <p:cNvPr id="13" name="Rounded Rectangle 12"/>
+          <p:cNvPr id="15" name="Rounded Rectangle 14"/>
           <p:cNvSpPr/>
           <p:nvPr/>
         </p:nvSpPr>
@@ -7982,7 +8457,7 @@
       </p:sp>
       <p:sp>
         <p:nvSpPr>
-          <p:cNvPr id="14" name="TextBox 13"/>
+          <p:cNvPr id="16" name="TextBox 15"/>
           <p:cNvSpPr txBox="1"/>
           <p:nvPr/>
         </p:nvSpPr>
@@ -8408,6 +8883,110 @@
         </p:nvSpPr>
         <p:spPr>
           <a:xfrm>
+            <a:off x="411479" y="1444752"/>
+            <a:ext cx="11368735" cy="4800600"/>
+          </a:xfrm>
+          <a:prstGeom prst="roundRect">
+            <a:avLst>
+              <a:gd name="adj" fmla="val 4000"/>
+            </a:avLst>
+          </a:prstGeom>
+          <a:solidFill>
+            <a:srgbClr val="FFFFFF">
+              <a:alpha val="84000"/>
+            </a:srgbClr>
+          </a:solidFill>
+          <a:ln w="19050">
+            <a:solidFill>
+              <a:srgbClr val="FFFFFF"/>
+            </a:solidFill>
+          </a:ln>
+          <a:effectLst>
+            <a:outerShdw blurRad="203200" dist="50800" dir="5400000" algn="t" rotWithShape="0">
+              <a:srgbClr val="1A2340">
+                <a:alpha val="20000"/>
+              </a:srgbClr>
+            </a:outerShdw>
+          </a:effectLst>
+        </p:spPr>
+        <p:style>
+          <a:lnRef idx="1">
+            <a:schemeClr val="accent1"/>
+          </a:lnRef>
+          <a:fillRef idx="3">
+            <a:schemeClr val="accent1"/>
+          </a:fillRef>
+          <a:effectRef idx="2">
+            <a:schemeClr val="accent1"/>
+          </a:effectRef>
+          <a:fontRef idx="minor">
+            <a:schemeClr val="lt1"/>
+          </a:fontRef>
+        </p:style>
+        <p:txBody>
+          <a:bodyPr rtlCol="0" anchor="ctr"/>
+          <a:lstStyle/>
+          <a:p>
+            <a:pPr algn="ctr"/>
+          </a:p>
+        </p:txBody>
+      </p:sp>
+      <p:sp>
+        <p:nvSpPr>
+          <p:cNvPr id="12" name="Rounded Rectangle 11"/>
+          <p:cNvSpPr/>
+          <p:nvPr/>
+        </p:nvSpPr>
+        <p:spPr>
+          <a:xfrm>
+            <a:off x="731519" y="1508760"/>
+            <a:ext cx="10728655" cy="32004"/>
+          </a:xfrm>
+          <a:prstGeom prst="roundRect">
+            <a:avLst>
+              <a:gd name="adj" fmla="val 50000"/>
+            </a:avLst>
+          </a:prstGeom>
+          <a:solidFill>
+            <a:srgbClr val="FFFFFF">
+              <a:alpha val="85000"/>
+            </a:srgbClr>
+          </a:solidFill>
+          <a:ln>
+            <a:noFill/>
+          </a:ln>
+          <a:effectLst/>
+        </p:spPr>
+        <p:style>
+          <a:lnRef idx="1">
+            <a:schemeClr val="accent1"/>
+          </a:lnRef>
+          <a:fillRef idx="3">
+            <a:schemeClr val="accent1"/>
+          </a:fillRef>
+          <a:effectRef idx="2">
+            <a:schemeClr val="accent1"/>
+          </a:effectRef>
+          <a:fontRef idx="minor">
+            <a:schemeClr val="lt1"/>
+          </a:fontRef>
+        </p:style>
+        <p:txBody>
+          <a:bodyPr rtlCol="0" anchor="ctr"/>
+          <a:lstStyle/>
+          <a:p>
+            <a:pPr algn="ctr"/>
+          </a:p>
+        </p:txBody>
+      </p:sp>
+      <p:sp>
+        <p:nvSpPr>
+          <p:cNvPr id="13" name="Rounded Rectangle 12"/>
+          <p:cNvSpPr/>
+          <p:nvPr/>
+        </p:nvSpPr>
+        <p:spPr>
+          <a:xfrm>
             <a:off x="1645919" y="2103120"/>
             <a:ext cx="8899855" cy="2794508"/>
           </a:xfrm>
@@ -8458,7 +9037,7 @@
       </p:sp>
       <p:sp>
         <p:nvSpPr>
-          <p:cNvPr id="12" name="Rounded Rectangle 11"/>
+          <p:cNvPr id="14" name="Rounded Rectangle 13"/>
           <p:cNvSpPr/>
           <p:nvPr/>
         </p:nvSpPr>
@@ -8506,7 +9085,7 @@
       </p:sp>
       <p:sp>
         <p:nvSpPr>
-          <p:cNvPr id="13" name="Rounded Rectangle 12"/>
+          <p:cNvPr id="15" name="Rounded Rectangle 14"/>
           <p:cNvSpPr/>
           <p:nvPr/>
         </p:nvSpPr>
@@ -8574,7 +9153,7 @@
       </p:sp>
       <p:sp>
         <p:nvSpPr>
-          <p:cNvPr id="14" name="TextBox 13"/>
+          <p:cNvPr id="16" name="TextBox 15"/>
           <p:cNvSpPr txBox="1"/>
           <p:nvPr/>
         </p:nvSpPr>
@@ -8994,7 +9573,111 @@
       </p:pic>
       <p:sp>
         <p:nvSpPr>
-          <p:cNvPr id="11" name="Oval 10"/>
+          <p:cNvPr id="11" name="Rounded Rectangle 10"/>
+          <p:cNvSpPr/>
+          <p:nvPr/>
+        </p:nvSpPr>
+        <p:spPr>
+          <a:xfrm>
+            <a:off x="411479" y="1444752"/>
+            <a:ext cx="11368735" cy="4800600"/>
+          </a:xfrm>
+          <a:prstGeom prst="roundRect">
+            <a:avLst>
+              <a:gd name="adj" fmla="val 4000"/>
+            </a:avLst>
+          </a:prstGeom>
+          <a:solidFill>
+            <a:srgbClr val="FFFFFF">
+              <a:alpha val="84000"/>
+            </a:srgbClr>
+          </a:solidFill>
+          <a:ln w="19050">
+            <a:solidFill>
+              <a:srgbClr val="FFFFFF"/>
+            </a:solidFill>
+          </a:ln>
+          <a:effectLst>
+            <a:outerShdw blurRad="203200" dist="50800" dir="5400000" algn="t" rotWithShape="0">
+              <a:srgbClr val="1A2340">
+                <a:alpha val="20000"/>
+              </a:srgbClr>
+            </a:outerShdw>
+          </a:effectLst>
+        </p:spPr>
+        <p:style>
+          <a:lnRef idx="1">
+            <a:schemeClr val="accent1"/>
+          </a:lnRef>
+          <a:fillRef idx="3">
+            <a:schemeClr val="accent1"/>
+          </a:fillRef>
+          <a:effectRef idx="2">
+            <a:schemeClr val="accent1"/>
+          </a:effectRef>
+          <a:fontRef idx="minor">
+            <a:schemeClr val="lt1"/>
+          </a:fontRef>
+        </p:style>
+        <p:txBody>
+          <a:bodyPr rtlCol="0" anchor="ctr"/>
+          <a:lstStyle/>
+          <a:p>
+            <a:pPr algn="ctr"/>
+          </a:p>
+        </p:txBody>
+      </p:sp>
+      <p:sp>
+        <p:nvSpPr>
+          <p:cNvPr id="12" name="Rounded Rectangle 11"/>
+          <p:cNvSpPr/>
+          <p:nvPr/>
+        </p:nvSpPr>
+        <p:spPr>
+          <a:xfrm>
+            <a:off x="731519" y="1508760"/>
+            <a:ext cx="10728655" cy="32004"/>
+          </a:xfrm>
+          <a:prstGeom prst="roundRect">
+            <a:avLst>
+              <a:gd name="adj" fmla="val 50000"/>
+            </a:avLst>
+          </a:prstGeom>
+          <a:solidFill>
+            <a:srgbClr val="FFFFFF">
+              <a:alpha val="85000"/>
+            </a:srgbClr>
+          </a:solidFill>
+          <a:ln>
+            <a:noFill/>
+          </a:ln>
+          <a:effectLst/>
+        </p:spPr>
+        <p:style>
+          <a:lnRef idx="1">
+            <a:schemeClr val="accent1"/>
+          </a:lnRef>
+          <a:fillRef idx="3">
+            <a:schemeClr val="accent1"/>
+          </a:fillRef>
+          <a:effectRef idx="2">
+            <a:schemeClr val="accent1"/>
+          </a:effectRef>
+          <a:fontRef idx="minor">
+            <a:schemeClr val="lt1"/>
+          </a:fontRef>
+        </p:style>
+        <p:txBody>
+          <a:bodyPr rtlCol="0" anchor="ctr"/>
+          <a:lstStyle/>
+          <a:p>
+            <a:pPr algn="ctr"/>
+          </a:p>
+        </p:txBody>
+      </p:sp>
+      <p:sp>
+        <p:nvSpPr>
+          <p:cNvPr id="13" name="Oval 12"/>
           <p:cNvSpPr/>
           <p:nvPr/>
         </p:nvSpPr>
@@ -9047,7 +9730,7 @@
       </p:sp>
       <p:sp>
         <p:nvSpPr>
-          <p:cNvPr id="12" name="TextBox 11"/>
+          <p:cNvPr id="14" name="TextBox 13"/>
           <p:cNvSpPr txBox="1"/>
           <p:nvPr/>
         </p:nvSpPr>
@@ -9480,14 +10163,177 @@
       </p:pic>
       <p:sp>
         <p:nvSpPr>
-          <p:cNvPr id="11" name="TextBox 10"/>
+          <p:cNvPr id="11" name="Rounded Rectangle 10"/>
+          <p:cNvSpPr/>
+          <p:nvPr/>
+        </p:nvSpPr>
+        <p:spPr>
+          <a:xfrm>
+            <a:off x="411479" y="1444752"/>
+            <a:ext cx="11368735" cy="4800600"/>
+          </a:xfrm>
+          <a:prstGeom prst="roundRect">
+            <a:avLst>
+              <a:gd name="adj" fmla="val 4000"/>
+            </a:avLst>
+          </a:prstGeom>
+          <a:solidFill>
+            <a:srgbClr val="FFFFFF">
+              <a:alpha val="84000"/>
+            </a:srgbClr>
+          </a:solidFill>
+          <a:ln w="19050">
+            <a:solidFill>
+              <a:srgbClr val="FFFFFF"/>
+            </a:solidFill>
+          </a:ln>
+          <a:effectLst>
+            <a:outerShdw blurRad="203200" dist="50800" dir="5400000" algn="t" rotWithShape="0">
+              <a:srgbClr val="1A2340">
+                <a:alpha val="20000"/>
+              </a:srgbClr>
+            </a:outerShdw>
+          </a:effectLst>
+        </p:spPr>
+        <p:style>
+          <a:lnRef idx="1">
+            <a:schemeClr val="accent1"/>
+          </a:lnRef>
+          <a:fillRef idx="3">
+            <a:schemeClr val="accent1"/>
+          </a:fillRef>
+          <a:effectRef idx="2">
+            <a:schemeClr val="accent1"/>
+          </a:effectRef>
+          <a:fontRef idx="minor">
+            <a:schemeClr val="lt1"/>
+          </a:fontRef>
+        </p:style>
+        <p:txBody>
+          <a:bodyPr rtlCol="0" anchor="ctr"/>
+          <a:lstStyle/>
+          <a:p>
+            <a:pPr algn="ctr"/>
+          </a:p>
+        </p:txBody>
+      </p:sp>
+      <p:sp>
+        <p:nvSpPr>
+          <p:cNvPr id="12" name="Rounded Rectangle 11"/>
+          <p:cNvSpPr/>
+          <p:nvPr/>
+        </p:nvSpPr>
+        <p:spPr>
+          <a:xfrm>
+            <a:off x="731519" y="1508760"/>
+            <a:ext cx="10728655" cy="32004"/>
+          </a:xfrm>
+          <a:prstGeom prst="roundRect">
+            <a:avLst>
+              <a:gd name="adj" fmla="val 50000"/>
+            </a:avLst>
+          </a:prstGeom>
+          <a:solidFill>
+            <a:srgbClr val="FFFFFF">
+              <a:alpha val="85000"/>
+            </a:srgbClr>
+          </a:solidFill>
+          <a:ln>
+            <a:noFill/>
+          </a:ln>
+          <a:effectLst/>
+        </p:spPr>
+        <p:style>
+          <a:lnRef idx="1">
+            <a:schemeClr val="accent1"/>
+          </a:lnRef>
+          <a:fillRef idx="3">
+            <a:schemeClr val="accent1"/>
+          </a:fillRef>
+          <a:effectRef idx="2">
+            <a:schemeClr val="accent1"/>
+          </a:effectRef>
+          <a:fontRef idx="minor">
+            <a:schemeClr val="lt1"/>
+          </a:fontRef>
+        </p:style>
+        <p:txBody>
+          <a:bodyPr rtlCol="0" anchor="ctr"/>
+          <a:lstStyle/>
+          <a:p>
+            <a:pPr algn="ctr"/>
+          </a:p>
+        </p:txBody>
+      </p:sp>
+      <p:sp>
+        <p:nvSpPr>
+          <p:cNvPr id="13" name="Rounded Rectangle 12"/>
+          <p:cNvSpPr/>
+          <p:nvPr/>
+        </p:nvSpPr>
+        <p:spPr>
+          <a:xfrm>
+            <a:off x="548640" y="1591056"/>
+            <a:ext cx="64008" cy="594360"/>
+          </a:xfrm>
+          <a:prstGeom prst="roundRect">
+            <a:avLst>
+              <a:gd name="adj" fmla="val 50000"/>
+            </a:avLst>
+          </a:prstGeom>
+          <a:solidFill>
+            <a:srgbClr val="8D6A2A"/>
+          </a:solidFill>
+          <a:ln>
+            <a:noFill/>
+          </a:ln>
+          <a:effectLst>
+            <a:outerShdw blurRad="203200" dist="50800" dir="5400000" algn="t" rotWithShape="0">
+              <a:srgbClr val="1A2340">
+                <a:alpha val="20000"/>
+              </a:srgbClr>
+            </a:outerShdw>
+          </a:effectLst>
+          <a:scene3d>
+            <a:camera prst="orthographicFront"/>
+            <a:lightRig rig="threePt" dir="t"/>
+          </a:scene3d>
+          <a:sp3d>
+            <a:bevelT w="44450" h="25400" prst="softRound"/>
+          </a:sp3d>
+        </p:spPr>
+        <p:style>
+          <a:lnRef idx="1">
+            <a:schemeClr val="accent1"/>
+          </a:lnRef>
+          <a:fillRef idx="3">
+            <a:schemeClr val="accent1"/>
+          </a:fillRef>
+          <a:effectRef idx="2">
+            <a:schemeClr val="accent1"/>
+          </a:effectRef>
+          <a:fontRef idx="minor">
+            <a:schemeClr val="lt1"/>
+          </a:fontRef>
+        </p:style>
+        <p:txBody>
+          <a:bodyPr rtlCol="0" anchor="ctr"/>
+          <a:lstStyle/>
+          <a:p>
+            <a:pPr algn="ctr"/>
+          </a:p>
+        </p:txBody>
+      </p:sp>
+      <p:sp>
+        <p:nvSpPr>
+          <p:cNvPr id="14" name="TextBox 13"/>
           <p:cNvSpPr txBox="1"/>
           <p:nvPr/>
         </p:nvSpPr>
         <p:spPr>
           <a:xfrm>
-            <a:off x="548640" y="1554480"/>
-            <a:ext cx="11094415" cy="795528"/>
+            <a:off x="777240" y="1554480"/>
+            <a:ext cx="10865815" cy="795528"/>
           </a:xfrm>
           <a:prstGeom prst="rect">
             <a:avLst/>
@@ -9519,7 +10365,7 @@
       </p:sp>
       <p:graphicFrame>
         <p:nvGraphicFramePr>
-          <p:cNvPr id="12" name="Table 11"/>
+          <p:cNvPr id="15" name="Table 14"/>
           <p:cNvGraphicFramePr>
             <a:graphicFrameLocks noGrp="1"/>
           </p:cNvGraphicFramePr>
@@ -10469,9 +11315,113 @@
           </a:prstGeom>
         </p:spPr>
       </p:pic>
+      <p:sp>
+        <p:nvSpPr>
+          <p:cNvPr id="11" name="Rounded Rectangle 10"/>
+          <p:cNvSpPr/>
+          <p:nvPr/>
+        </p:nvSpPr>
+        <p:spPr>
+          <a:xfrm>
+            <a:off x="411479" y="1444752"/>
+            <a:ext cx="11368735" cy="4800600"/>
+          </a:xfrm>
+          <a:prstGeom prst="roundRect">
+            <a:avLst>
+              <a:gd name="adj" fmla="val 4000"/>
+            </a:avLst>
+          </a:prstGeom>
+          <a:solidFill>
+            <a:srgbClr val="FFFFFF">
+              <a:alpha val="84000"/>
+            </a:srgbClr>
+          </a:solidFill>
+          <a:ln w="19050">
+            <a:solidFill>
+              <a:srgbClr val="FFFFFF"/>
+            </a:solidFill>
+          </a:ln>
+          <a:effectLst>
+            <a:outerShdw blurRad="203200" dist="50800" dir="5400000" algn="t" rotWithShape="0">
+              <a:srgbClr val="1A2340">
+                <a:alpha val="20000"/>
+              </a:srgbClr>
+            </a:outerShdw>
+          </a:effectLst>
+        </p:spPr>
+        <p:style>
+          <a:lnRef idx="1">
+            <a:schemeClr val="accent1"/>
+          </a:lnRef>
+          <a:fillRef idx="3">
+            <a:schemeClr val="accent1"/>
+          </a:fillRef>
+          <a:effectRef idx="2">
+            <a:schemeClr val="accent1"/>
+          </a:effectRef>
+          <a:fontRef idx="minor">
+            <a:schemeClr val="lt1"/>
+          </a:fontRef>
+        </p:style>
+        <p:txBody>
+          <a:bodyPr rtlCol="0" anchor="ctr"/>
+          <a:lstStyle/>
+          <a:p>
+            <a:pPr algn="ctr"/>
+          </a:p>
+        </p:txBody>
+      </p:sp>
+      <p:sp>
+        <p:nvSpPr>
+          <p:cNvPr id="12" name="Rounded Rectangle 11"/>
+          <p:cNvSpPr/>
+          <p:nvPr/>
+        </p:nvSpPr>
+        <p:spPr>
+          <a:xfrm>
+            <a:off x="731519" y="1508760"/>
+            <a:ext cx="10728655" cy="32004"/>
+          </a:xfrm>
+          <a:prstGeom prst="roundRect">
+            <a:avLst>
+              <a:gd name="adj" fmla="val 50000"/>
+            </a:avLst>
+          </a:prstGeom>
+          <a:solidFill>
+            <a:srgbClr val="FFFFFF">
+              <a:alpha val="85000"/>
+            </a:srgbClr>
+          </a:solidFill>
+          <a:ln>
+            <a:noFill/>
+          </a:ln>
+          <a:effectLst/>
+        </p:spPr>
+        <p:style>
+          <a:lnRef idx="1">
+            <a:schemeClr val="accent1"/>
+          </a:lnRef>
+          <a:fillRef idx="3">
+            <a:schemeClr val="accent1"/>
+          </a:fillRef>
+          <a:effectRef idx="2">
+            <a:schemeClr val="accent1"/>
+          </a:effectRef>
+          <a:fontRef idx="minor">
+            <a:schemeClr val="lt1"/>
+          </a:fontRef>
+        </p:style>
+        <p:txBody>
+          <a:bodyPr rtlCol="0" anchor="ctr"/>
+          <a:lstStyle/>
+          <a:p>
+            <a:pPr algn="ctr"/>
+          </a:p>
+        </p:txBody>
+      </p:sp>
       <p:graphicFrame>
         <p:nvGraphicFramePr>
-          <p:cNvPr id="11" name="Table 10"/>
+          <p:cNvPr id="13" name="Table 12"/>
           <p:cNvGraphicFramePr>
             <a:graphicFrameLocks noGrp="1"/>
           </p:cNvGraphicFramePr>
@@ -11151,7 +12101,111 @@
       </p:pic>
       <p:sp>
         <p:nvSpPr>
-          <p:cNvPr id="11" name="Oval 10"/>
+          <p:cNvPr id="11" name="Rounded Rectangle 10"/>
+          <p:cNvSpPr/>
+          <p:nvPr/>
+        </p:nvSpPr>
+        <p:spPr>
+          <a:xfrm>
+            <a:off x="411479" y="1444752"/>
+            <a:ext cx="11368735" cy="4800600"/>
+          </a:xfrm>
+          <a:prstGeom prst="roundRect">
+            <a:avLst>
+              <a:gd name="adj" fmla="val 4000"/>
+            </a:avLst>
+          </a:prstGeom>
+          <a:solidFill>
+            <a:srgbClr val="FFFFFF">
+              <a:alpha val="84000"/>
+            </a:srgbClr>
+          </a:solidFill>
+          <a:ln w="19050">
+            <a:solidFill>
+              <a:srgbClr val="FFFFFF"/>
+            </a:solidFill>
+          </a:ln>
+          <a:effectLst>
+            <a:outerShdw blurRad="203200" dist="50800" dir="5400000" algn="t" rotWithShape="0">
+              <a:srgbClr val="1A2340">
+                <a:alpha val="20000"/>
+              </a:srgbClr>
+            </a:outerShdw>
+          </a:effectLst>
+        </p:spPr>
+        <p:style>
+          <a:lnRef idx="1">
+            <a:schemeClr val="accent1"/>
+          </a:lnRef>
+          <a:fillRef idx="3">
+            <a:schemeClr val="accent1"/>
+          </a:fillRef>
+          <a:effectRef idx="2">
+            <a:schemeClr val="accent1"/>
+          </a:effectRef>
+          <a:fontRef idx="minor">
+            <a:schemeClr val="lt1"/>
+          </a:fontRef>
+        </p:style>
+        <p:txBody>
+          <a:bodyPr rtlCol="0" anchor="ctr"/>
+          <a:lstStyle/>
+          <a:p>
+            <a:pPr algn="ctr"/>
+          </a:p>
+        </p:txBody>
+      </p:sp>
+      <p:sp>
+        <p:nvSpPr>
+          <p:cNvPr id="12" name="Rounded Rectangle 11"/>
+          <p:cNvSpPr/>
+          <p:nvPr/>
+        </p:nvSpPr>
+        <p:spPr>
+          <a:xfrm>
+            <a:off x="731519" y="1508760"/>
+            <a:ext cx="10728655" cy="32004"/>
+          </a:xfrm>
+          <a:prstGeom prst="roundRect">
+            <a:avLst>
+              <a:gd name="adj" fmla="val 50000"/>
+            </a:avLst>
+          </a:prstGeom>
+          <a:solidFill>
+            <a:srgbClr val="FFFFFF">
+              <a:alpha val="85000"/>
+            </a:srgbClr>
+          </a:solidFill>
+          <a:ln>
+            <a:noFill/>
+          </a:ln>
+          <a:effectLst/>
+        </p:spPr>
+        <p:style>
+          <a:lnRef idx="1">
+            <a:schemeClr val="accent1"/>
+          </a:lnRef>
+          <a:fillRef idx="3">
+            <a:schemeClr val="accent1"/>
+          </a:fillRef>
+          <a:effectRef idx="2">
+            <a:schemeClr val="accent1"/>
+          </a:effectRef>
+          <a:fontRef idx="minor">
+            <a:schemeClr val="lt1"/>
+          </a:fontRef>
+        </p:style>
+        <p:txBody>
+          <a:bodyPr rtlCol="0" anchor="ctr"/>
+          <a:lstStyle/>
+          <a:p>
+            <a:pPr algn="ctr"/>
+          </a:p>
+        </p:txBody>
+      </p:sp>
+      <p:sp>
+        <p:nvSpPr>
+          <p:cNvPr id="13" name="Oval 12"/>
           <p:cNvSpPr/>
           <p:nvPr/>
         </p:nvSpPr>
@@ -11204,7 +12258,7 @@
       </p:sp>
       <p:sp>
         <p:nvSpPr>
-          <p:cNvPr id="12" name="TextBox 11"/>
+          <p:cNvPr id="14" name="TextBox 13"/>
           <p:cNvSpPr txBox="1"/>
           <p:nvPr/>
         </p:nvSpPr>
@@ -11238,7 +12292,7 @@
       </p:sp>
       <p:sp>
         <p:nvSpPr>
-          <p:cNvPr id="13" name="Oval 12"/>
+          <p:cNvPr id="15" name="Oval 14"/>
           <p:cNvSpPr/>
           <p:nvPr/>
         </p:nvSpPr>
@@ -11291,7 +12345,7 @@
       </p:sp>
       <p:sp>
         <p:nvSpPr>
-          <p:cNvPr id="14" name="TextBox 13"/>
+          <p:cNvPr id="16" name="TextBox 15"/>
           <p:cNvSpPr txBox="1"/>
           <p:nvPr/>
         </p:nvSpPr>
@@ -11325,7 +12379,7 @@
       </p:sp>
       <p:sp>
         <p:nvSpPr>
-          <p:cNvPr id="15" name="Oval 14"/>
+          <p:cNvPr id="17" name="Oval 16"/>
           <p:cNvSpPr/>
           <p:nvPr/>
         </p:nvSpPr>
@@ -11378,7 +12432,7 @@
       </p:sp>
       <p:sp>
         <p:nvSpPr>
-          <p:cNvPr id="16" name="TextBox 15"/>
+          <p:cNvPr id="18" name="TextBox 17"/>
           <p:cNvSpPr txBox="1"/>
           <p:nvPr/>
         </p:nvSpPr>
@@ -11793,7 +12847,111 @@
       </p:pic>
       <p:sp>
         <p:nvSpPr>
-          <p:cNvPr id="11" name="TextBox 10"/>
+          <p:cNvPr id="11" name="Rounded Rectangle 10"/>
+          <p:cNvSpPr/>
+          <p:nvPr/>
+        </p:nvSpPr>
+        <p:spPr>
+          <a:xfrm>
+            <a:off x="411479" y="1444752"/>
+            <a:ext cx="11368735" cy="4800600"/>
+          </a:xfrm>
+          <a:prstGeom prst="roundRect">
+            <a:avLst>
+              <a:gd name="adj" fmla="val 4000"/>
+            </a:avLst>
+          </a:prstGeom>
+          <a:solidFill>
+            <a:srgbClr val="FFFFFF">
+              <a:alpha val="84000"/>
+            </a:srgbClr>
+          </a:solidFill>
+          <a:ln w="19050">
+            <a:solidFill>
+              <a:srgbClr val="FFFFFF"/>
+            </a:solidFill>
+          </a:ln>
+          <a:effectLst>
+            <a:outerShdw blurRad="203200" dist="50800" dir="5400000" algn="t" rotWithShape="0">
+              <a:srgbClr val="1A2340">
+                <a:alpha val="20000"/>
+              </a:srgbClr>
+            </a:outerShdw>
+          </a:effectLst>
+        </p:spPr>
+        <p:style>
+          <a:lnRef idx="1">
+            <a:schemeClr val="accent1"/>
+          </a:lnRef>
+          <a:fillRef idx="3">
+            <a:schemeClr val="accent1"/>
+          </a:fillRef>
+          <a:effectRef idx="2">
+            <a:schemeClr val="accent1"/>
+          </a:effectRef>
+          <a:fontRef idx="minor">
+            <a:schemeClr val="lt1"/>
+          </a:fontRef>
+        </p:style>
+        <p:txBody>
+          <a:bodyPr rtlCol="0" anchor="ctr"/>
+          <a:lstStyle/>
+          <a:p>
+            <a:pPr algn="ctr"/>
+          </a:p>
+        </p:txBody>
+      </p:sp>
+      <p:sp>
+        <p:nvSpPr>
+          <p:cNvPr id="12" name="Rounded Rectangle 11"/>
+          <p:cNvSpPr/>
+          <p:nvPr/>
+        </p:nvSpPr>
+        <p:spPr>
+          <a:xfrm>
+            <a:off x="731519" y="1508760"/>
+            <a:ext cx="10728655" cy="32004"/>
+          </a:xfrm>
+          <a:prstGeom prst="roundRect">
+            <a:avLst>
+              <a:gd name="adj" fmla="val 50000"/>
+            </a:avLst>
+          </a:prstGeom>
+          <a:solidFill>
+            <a:srgbClr val="FFFFFF">
+              <a:alpha val="85000"/>
+            </a:srgbClr>
+          </a:solidFill>
+          <a:ln>
+            <a:noFill/>
+          </a:ln>
+          <a:effectLst/>
+        </p:spPr>
+        <p:style>
+          <a:lnRef idx="1">
+            <a:schemeClr val="accent1"/>
+          </a:lnRef>
+          <a:fillRef idx="3">
+            <a:schemeClr val="accent1"/>
+          </a:fillRef>
+          <a:effectRef idx="2">
+            <a:schemeClr val="accent1"/>
+          </a:effectRef>
+          <a:fontRef idx="minor">
+            <a:schemeClr val="lt1"/>
+          </a:fontRef>
+        </p:style>
+        <p:txBody>
+          <a:bodyPr rtlCol="0" anchor="ctr"/>
+          <a:lstStyle/>
+          <a:p>
+            <a:pPr algn="ctr"/>
+          </a:p>
+        </p:txBody>
+      </p:sp>
+      <p:sp>
+        <p:nvSpPr>
+          <p:cNvPr id="13" name="TextBox 12"/>
           <p:cNvSpPr txBox="1"/>
           <p:nvPr/>
         </p:nvSpPr>
@@ -11827,7 +12985,7 @@
       </p:sp>
       <p:sp>
         <p:nvSpPr>
-          <p:cNvPr id="12" name="Rounded Rectangle 11"/>
+          <p:cNvPr id="14" name="Rounded Rectangle 13"/>
           <p:cNvSpPr/>
           <p:nvPr/>
         </p:nvSpPr>
@@ -11883,7 +13041,7 @@
       </p:sp>
       <p:sp>
         <p:nvSpPr>
-          <p:cNvPr id="13" name="Oval 12"/>
+          <p:cNvPr id="15" name="Oval 14"/>
           <p:cNvSpPr/>
           <p:nvPr/>
         </p:nvSpPr>
@@ -11936,7 +13094,7 @@
       </p:sp>
       <p:sp>
         <p:nvSpPr>
-          <p:cNvPr id="14" name="TextBox 13"/>
+          <p:cNvPr id="16" name="TextBox 15"/>
           <p:cNvSpPr txBox="1"/>
           <p:nvPr/>
         </p:nvSpPr>
@@ -11970,7 +13128,7 @@
       </p:sp>
       <p:sp>
         <p:nvSpPr>
-          <p:cNvPr id="15" name="Rounded Rectangle 14"/>
+          <p:cNvPr id="17" name="Rounded Rectangle 16"/>
           <p:cNvSpPr/>
           <p:nvPr/>
         </p:nvSpPr>
@@ -12026,7 +13184,7 @@
       </p:sp>
       <p:sp>
         <p:nvSpPr>
-          <p:cNvPr id="16" name="Oval 15"/>
+          <p:cNvPr id="18" name="Oval 17"/>
           <p:cNvSpPr/>
           <p:nvPr/>
         </p:nvSpPr>
@@ -12079,7 +13237,7 @@
       </p:sp>
       <p:sp>
         <p:nvSpPr>
-          <p:cNvPr id="17" name="TextBox 16"/>
+          <p:cNvPr id="19" name="TextBox 18"/>
           <p:cNvSpPr txBox="1"/>
           <p:nvPr/>
         </p:nvSpPr>
@@ -12113,7 +13271,7 @@
       </p:sp>
       <p:sp>
         <p:nvSpPr>
-          <p:cNvPr id="18" name="Rounded Rectangle 17"/>
+          <p:cNvPr id="20" name="Rounded Rectangle 19"/>
           <p:cNvSpPr/>
           <p:nvPr/>
         </p:nvSpPr>
@@ -12169,7 +13327,7 @@
       </p:sp>
       <p:sp>
         <p:nvSpPr>
-          <p:cNvPr id="19" name="Oval 18"/>
+          <p:cNvPr id="21" name="Oval 20"/>
           <p:cNvSpPr/>
           <p:nvPr/>
         </p:nvSpPr>
@@ -12222,7 +13380,7 @@
       </p:sp>
       <p:sp>
         <p:nvSpPr>
-          <p:cNvPr id="20" name="TextBox 19"/>
+          <p:cNvPr id="22" name="TextBox 21"/>
           <p:cNvSpPr txBox="1"/>
           <p:nvPr/>
         </p:nvSpPr>
@@ -12256,7 +13414,7 @@
       </p:sp>
       <p:sp>
         <p:nvSpPr>
-          <p:cNvPr id="21" name="Rounded Rectangle 20"/>
+          <p:cNvPr id="23" name="Rounded Rectangle 22"/>
           <p:cNvSpPr/>
           <p:nvPr/>
         </p:nvSpPr>
@@ -12312,7 +13470,7 @@
       </p:sp>
       <p:sp>
         <p:nvSpPr>
-          <p:cNvPr id="22" name="Oval 21"/>
+          <p:cNvPr id="24" name="Oval 23"/>
           <p:cNvSpPr/>
           <p:nvPr/>
         </p:nvSpPr>
@@ -12365,7 +13523,7 @@
       </p:sp>
       <p:sp>
         <p:nvSpPr>
-          <p:cNvPr id="23" name="TextBox 22"/>
+          <p:cNvPr id="25" name="TextBox 24"/>
           <p:cNvSpPr txBox="1"/>
           <p:nvPr/>
         </p:nvSpPr>
@@ -12780,7 +13938,111 @@
       </p:pic>
       <p:sp>
         <p:nvSpPr>
-          <p:cNvPr id="11" name="Oval 10"/>
+          <p:cNvPr id="11" name="Rounded Rectangle 10"/>
+          <p:cNvSpPr/>
+          <p:nvPr/>
+        </p:nvSpPr>
+        <p:spPr>
+          <a:xfrm>
+            <a:off x="411479" y="1444752"/>
+            <a:ext cx="11368735" cy="4800600"/>
+          </a:xfrm>
+          <a:prstGeom prst="roundRect">
+            <a:avLst>
+              <a:gd name="adj" fmla="val 4000"/>
+            </a:avLst>
+          </a:prstGeom>
+          <a:solidFill>
+            <a:srgbClr val="FFFFFF">
+              <a:alpha val="84000"/>
+            </a:srgbClr>
+          </a:solidFill>
+          <a:ln w="19050">
+            <a:solidFill>
+              <a:srgbClr val="FFFFFF"/>
+            </a:solidFill>
+          </a:ln>
+          <a:effectLst>
+            <a:outerShdw blurRad="203200" dist="50800" dir="5400000" algn="t" rotWithShape="0">
+              <a:srgbClr val="1A2340">
+                <a:alpha val="20000"/>
+              </a:srgbClr>
+            </a:outerShdw>
+          </a:effectLst>
+        </p:spPr>
+        <p:style>
+          <a:lnRef idx="1">
+            <a:schemeClr val="accent1"/>
+          </a:lnRef>
+          <a:fillRef idx="3">
+            <a:schemeClr val="accent1"/>
+          </a:fillRef>
+          <a:effectRef idx="2">
+            <a:schemeClr val="accent1"/>
+          </a:effectRef>
+          <a:fontRef idx="minor">
+            <a:schemeClr val="lt1"/>
+          </a:fontRef>
+        </p:style>
+        <p:txBody>
+          <a:bodyPr rtlCol="0" anchor="ctr"/>
+          <a:lstStyle/>
+          <a:p>
+            <a:pPr algn="ctr"/>
+          </a:p>
+        </p:txBody>
+      </p:sp>
+      <p:sp>
+        <p:nvSpPr>
+          <p:cNvPr id="12" name="Rounded Rectangle 11"/>
+          <p:cNvSpPr/>
+          <p:nvPr/>
+        </p:nvSpPr>
+        <p:spPr>
+          <a:xfrm>
+            <a:off x="731519" y="1508760"/>
+            <a:ext cx="10728655" cy="32004"/>
+          </a:xfrm>
+          <a:prstGeom prst="roundRect">
+            <a:avLst>
+              <a:gd name="adj" fmla="val 50000"/>
+            </a:avLst>
+          </a:prstGeom>
+          <a:solidFill>
+            <a:srgbClr val="FFFFFF">
+              <a:alpha val="85000"/>
+            </a:srgbClr>
+          </a:solidFill>
+          <a:ln>
+            <a:noFill/>
+          </a:ln>
+          <a:effectLst/>
+        </p:spPr>
+        <p:style>
+          <a:lnRef idx="1">
+            <a:schemeClr val="accent1"/>
+          </a:lnRef>
+          <a:fillRef idx="3">
+            <a:schemeClr val="accent1"/>
+          </a:fillRef>
+          <a:effectRef idx="2">
+            <a:schemeClr val="accent1"/>
+          </a:effectRef>
+          <a:fontRef idx="minor">
+            <a:schemeClr val="lt1"/>
+          </a:fontRef>
+        </p:style>
+        <p:txBody>
+          <a:bodyPr rtlCol="0" anchor="ctr"/>
+          <a:lstStyle/>
+          <a:p>
+            <a:pPr algn="ctr"/>
+          </a:p>
+        </p:txBody>
+      </p:sp>
+      <p:sp>
+        <p:nvSpPr>
+          <p:cNvPr id="13" name="Oval 12"/>
           <p:cNvSpPr/>
           <p:nvPr/>
         </p:nvSpPr>
@@ -12833,7 +14095,7 @@
       </p:sp>
       <p:sp>
         <p:nvSpPr>
-          <p:cNvPr id="12" name="TextBox 11"/>
+          <p:cNvPr id="14" name="TextBox 13"/>
           <p:cNvSpPr txBox="1"/>
           <p:nvPr/>
         </p:nvSpPr>
@@ -12867,7 +14129,7 @@
       </p:sp>
       <p:sp>
         <p:nvSpPr>
-          <p:cNvPr id="13" name="Oval 12"/>
+          <p:cNvPr id="15" name="Oval 14"/>
           <p:cNvSpPr/>
           <p:nvPr/>
         </p:nvSpPr>
@@ -12920,7 +14182,7 @@
       </p:sp>
       <p:sp>
         <p:nvSpPr>
-          <p:cNvPr id="14" name="TextBox 13"/>
+          <p:cNvPr id="16" name="TextBox 15"/>
           <p:cNvSpPr txBox="1"/>
           <p:nvPr/>
         </p:nvSpPr>
@@ -12954,7 +14216,7 @@
       </p:sp>
       <p:sp>
         <p:nvSpPr>
-          <p:cNvPr id="15" name="Oval 14"/>
+          <p:cNvPr id="17" name="Oval 16"/>
           <p:cNvSpPr/>
           <p:nvPr/>
         </p:nvSpPr>
@@ -13007,7 +14269,7 @@
       </p:sp>
       <p:sp>
         <p:nvSpPr>
-          <p:cNvPr id="16" name="TextBox 15"/>
+          <p:cNvPr id="18" name="TextBox 17"/>
           <p:cNvSpPr txBox="1"/>
           <p:nvPr/>
         </p:nvSpPr>
@@ -13041,7 +14303,7 @@
       </p:sp>
       <p:sp>
         <p:nvSpPr>
-          <p:cNvPr id="17" name="Oval 16"/>
+          <p:cNvPr id="19" name="Oval 18"/>
           <p:cNvSpPr/>
           <p:nvPr/>
         </p:nvSpPr>
@@ -13094,7 +14356,7 @@
       </p:sp>
       <p:sp>
         <p:nvSpPr>
-          <p:cNvPr id="18" name="TextBox 17"/>
+          <p:cNvPr id="20" name="TextBox 19"/>
           <p:cNvSpPr txBox="1"/>
           <p:nvPr/>
         </p:nvSpPr>
@@ -13128,7 +14390,7 @@
       </p:sp>
       <p:sp>
         <p:nvSpPr>
-          <p:cNvPr id="19" name="Oval 18"/>
+          <p:cNvPr id="21" name="Oval 20"/>
           <p:cNvSpPr/>
           <p:nvPr/>
         </p:nvSpPr>
@@ -13181,7 +14443,7 @@
       </p:sp>
       <p:sp>
         <p:nvSpPr>
-          <p:cNvPr id="20" name="TextBox 19"/>
+          <p:cNvPr id="22" name="TextBox 21"/>
           <p:cNvSpPr txBox="1"/>
           <p:nvPr/>
         </p:nvSpPr>
@@ -13215,7 +14477,7 @@
       </p:sp>
       <p:sp>
         <p:nvSpPr>
-          <p:cNvPr id="21" name="Rounded Rectangle 20"/>
+          <p:cNvPr id="23" name="Rounded Rectangle 22"/>
           <p:cNvSpPr/>
           <p:nvPr/>
         </p:nvSpPr>
@@ -13271,7 +14533,7 @@
       </p:sp>
       <p:sp>
         <p:nvSpPr>
-          <p:cNvPr id="22" name="Rounded Rectangle 21"/>
+          <p:cNvPr id="24" name="Rounded Rectangle 23"/>
           <p:cNvSpPr/>
           <p:nvPr/>
         </p:nvSpPr>
@@ -13319,7 +14581,7 @@
       </p:sp>
       <p:sp>
         <p:nvSpPr>
-          <p:cNvPr id="23" name="TextBox 22"/>
+          <p:cNvPr id="25" name="TextBox 24"/>
           <p:cNvSpPr txBox="1"/>
           <p:nvPr/>
         </p:nvSpPr>
@@ -13777,7 +15039,111 @@
       </p:pic>
       <p:sp>
         <p:nvSpPr>
-          <p:cNvPr id="11" name="TextBox 10"/>
+          <p:cNvPr id="11" name="Rounded Rectangle 10"/>
+          <p:cNvSpPr/>
+          <p:nvPr/>
+        </p:nvSpPr>
+        <p:spPr>
+          <a:xfrm>
+            <a:off x="411479" y="1444752"/>
+            <a:ext cx="11368735" cy="4800600"/>
+          </a:xfrm>
+          <a:prstGeom prst="roundRect">
+            <a:avLst>
+              <a:gd name="adj" fmla="val 4000"/>
+            </a:avLst>
+          </a:prstGeom>
+          <a:solidFill>
+            <a:srgbClr val="FFFFFF">
+              <a:alpha val="84000"/>
+            </a:srgbClr>
+          </a:solidFill>
+          <a:ln w="19050">
+            <a:solidFill>
+              <a:srgbClr val="FFFFFF"/>
+            </a:solidFill>
+          </a:ln>
+          <a:effectLst>
+            <a:outerShdw blurRad="203200" dist="50800" dir="5400000" algn="t" rotWithShape="0">
+              <a:srgbClr val="1A2340">
+                <a:alpha val="20000"/>
+              </a:srgbClr>
+            </a:outerShdw>
+          </a:effectLst>
+        </p:spPr>
+        <p:style>
+          <a:lnRef idx="1">
+            <a:schemeClr val="accent1"/>
+          </a:lnRef>
+          <a:fillRef idx="3">
+            <a:schemeClr val="accent1"/>
+          </a:fillRef>
+          <a:effectRef idx="2">
+            <a:schemeClr val="accent1"/>
+          </a:effectRef>
+          <a:fontRef idx="minor">
+            <a:schemeClr val="lt1"/>
+          </a:fontRef>
+        </p:style>
+        <p:txBody>
+          <a:bodyPr rtlCol="0" anchor="ctr"/>
+          <a:lstStyle/>
+          <a:p>
+            <a:pPr algn="ctr"/>
+          </a:p>
+        </p:txBody>
+      </p:sp>
+      <p:sp>
+        <p:nvSpPr>
+          <p:cNvPr id="12" name="Rounded Rectangle 11"/>
+          <p:cNvSpPr/>
+          <p:nvPr/>
+        </p:nvSpPr>
+        <p:spPr>
+          <a:xfrm>
+            <a:off x="731519" y="1508760"/>
+            <a:ext cx="10728655" cy="32004"/>
+          </a:xfrm>
+          <a:prstGeom prst="roundRect">
+            <a:avLst>
+              <a:gd name="adj" fmla="val 50000"/>
+            </a:avLst>
+          </a:prstGeom>
+          <a:solidFill>
+            <a:srgbClr val="FFFFFF">
+              <a:alpha val="85000"/>
+            </a:srgbClr>
+          </a:solidFill>
+          <a:ln>
+            <a:noFill/>
+          </a:ln>
+          <a:effectLst/>
+        </p:spPr>
+        <p:style>
+          <a:lnRef idx="1">
+            <a:schemeClr val="accent1"/>
+          </a:lnRef>
+          <a:fillRef idx="3">
+            <a:schemeClr val="accent1"/>
+          </a:fillRef>
+          <a:effectRef idx="2">
+            <a:schemeClr val="accent1"/>
+          </a:effectRef>
+          <a:fontRef idx="minor">
+            <a:schemeClr val="lt1"/>
+          </a:fontRef>
+        </p:style>
+        <p:txBody>
+          <a:bodyPr rtlCol="0" anchor="ctr"/>
+          <a:lstStyle/>
+          <a:p>
+            <a:pPr algn="ctr"/>
+          </a:p>
+        </p:txBody>
+      </p:sp>
+      <p:sp>
+        <p:nvSpPr>
+          <p:cNvPr id="13" name="TextBox 12"/>
           <p:cNvSpPr txBox="1"/>
           <p:nvPr/>
         </p:nvSpPr>
@@ -13811,7 +15177,7 @@
       </p:sp>
       <p:sp>
         <p:nvSpPr>
-          <p:cNvPr id="12" name="Rounded Rectangle 11"/>
+          <p:cNvPr id="14" name="Rounded Rectangle 13"/>
           <p:cNvSpPr/>
           <p:nvPr/>
         </p:nvSpPr>
@@ -13867,7 +15233,7 @@
       </p:sp>
       <p:sp>
         <p:nvSpPr>
-          <p:cNvPr id="13" name="Oval 12"/>
+          <p:cNvPr id="15" name="Oval 14"/>
           <p:cNvSpPr/>
           <p:nvPr/>
         </p:nvSpPr>
@@ -13920,7 +15286,7 @@
       </p:sp>
       <p:sp>
         <p:nvSpPr>
-          <p:cNvPr id="14" name="TextBox 13"/>
+          <p:cNvPr id="16" name="TextBox 15"/>
           <p:cNvSpPr txBox="1"/>
           <p:nvPr/>
         </p:nvSpPr>
@@ -13954,7 +15320,7 @@
       </p:sp>
       <p:sp>
         <p:nvSpPr>
-          <p:cNvPr id="15" name="Rounded Rectangle 14"/>
+          <p:cNvPr id="17" name="Rounded Rectangle 16"/>
           <p:cNvSpPr/>
           <p:nvPr/>
         </p:nvSpPr>
@@ -14013,7 +15379,7 @@
       </p:sp>
       <p:sp>
         <p:nvSpPr>
-          <p:cNvPr id="16" name="Oval 15"/>
+          <p:cNvPr id="18" name="Oval 17"/>
           <p:cNvSpPr/>
           <p:nvPr/>
         </p:nvSpPr>
@@ -14066,7 +15432,7 @@
       </p:sp>
       <p:sp>
         <p:nvSpPr>
-          <p:cNvPr id="17" name="TextBox 16"/>
+          <p:cNvPr id="19" name="TextBox 18"/>
           <p:cNvSpPr txBox="1"/>
           <p:nvPr/>
         </p:nvSpPr>
@@ -14100,7 +15466,7 @@
       </p:sp>
       <p:sp>
         <p:nvSpPr>
-          <p:cNvPr id="18" name="Rounded Rectangle 17"/>
+          <p:cNvPr id="20" name="Rounded Rectangle 19"/>
           <p:cNvSpPr/>
           <p:nvPr/>
         </p:nvSpPr>
@@ -14156,7 +15522,7 @@
       </p:sp>
       <p:sp>
         <p:nvSpPr>
-          <p:cNvPr id="19" name="Oval 18"/>
+          <p:cNvPr id="21" name="Oval 20"/>
           <p:cNvSpPr/>
           <p:nvPr/>
         </p:nvSpPr>
@@ -14209,7 +15575,7 @@
       </p:sp>
       <p:sp>
         <p:nvSpPr>
-          <p:cNvPr id="20" name="TextBox 19"/>
+          <p:cNvPr id="22" name="TextBox 21"/>
           <p:cNvSpPr txBox="1"/>
           <p:nvPr/>
         </p:nvSpPr>
@@ -14243,7 +15609,7 @@
       </p:sp>
       <p:sp>
         <p:nvSpPr>
-          <p:cNvPr id="21" name="Rounded Rectangle 20"/>
+          <p:cNvPr id="23" name="Rounded Rectangle 22"/>
           <p:cNvSpPr/>
           <p:nvPr/>
         </p:nvSpPr>
@@ -14299,7 +15665,7 @@
       </p:sp>
       <p:sp>
         <p:nvSpPr>
-          <p:cNvPr id="22" name="Oval 21"/>
+          <p:cNvPr id="24" name="Oval 23"/>
           <p:cNvSpPr/>
           <p:nvPr/>
         </p:nvSpPr>
@@ -14352,7 +15718,7 @@
       </p:sp>
       <p:sp>
         <p:nvSpPr>
-          <p:cNvPr id="23" name="TextBox 22"/>
+          <p:cNvPr id="25" name="TextBox 24"/>
           <p:cNvSpPr txBox="1"/>
           <p:nvPr/>
         </p:nvSpPr>
@@ -14386,7 +15752,7 @@
       </p:sp>
       <p:sp>
         <p:nvSpPr>
-          <p:cNvPr id="24" name="TextBox 23"/>
+          <p:cNvPr id="26" name="TextBox 25"/>
           <p:cNvSpPr txBox="1"/>
           <p:nvPr/>
         </p:nvSpPr>
@@ -14810,7 +16176,111 @@
       </p:pic>
       <p:sp>
         <p:nvSpPr>
-          <p:cNvPr id="11" name="TextBox 10"/>
+          <p:cNvPr id="11" name="Rounded Rectangle 10"/>
+          <p:cNvSpPr/>
+          <p:nvPr/>
+        </p:nvSpPr>
+        <p:spPr>
+          <a:xfrm>
+            <a:off x="411479" y="1444752"/>
+            <a:ext cx="11368735" cy="4800600"/>
+          </a:xfrm>
+          <a:prstGeom prst="roundRect">
+            <a:avLst>
+              <a:gd name="adj" fmla="val 4000"/>
+            </a:avLst>
+          </a:prstGeom>
+          <a:solidFill>
+            <a:srgbClr val="FFFFFF">
+              <a:alpha val="84000"/>
+            </a:srgbClr>
+          </a:solidFill>
+          <a:ln w="19050">
+            <a:solidFill>
+              <a:srgbClr val="FFFFFF"/>
+            </a:solidFill>
+          </a:ln>
+          <a:effectLst>
+            <a:outerShdw blurRad="203200" dist="50800" dir="5400000" algn="t" rotWithShape="0">
+              <a:srgbClr val="1A2340">
+                <a:alpha val="20000"/>
+              </a:srgbClr>
+            </a:outerShdw>
+          </a:effectLst>
+        </p:spPr>
+        <p:style>
+          <a:lnRef idx="1">
+            <a:schemeClr val="accent1"/>
+          </a:lnRef>
+          <a:fillRef idx="3">
+            <a:schemeClr val="accent1"/>
+          </a:fillRef>
+          <a:effectRef idx="2">
+            <a:schemeClr val="accent1"/>
+          </a:effectRef>
+          <a:fontRef idx="minor">
+            <a:schemeClr val="lt1"/>
+          </a:fontRef>
+        </p:style>
+        <p:txBody>
+          <a:bodyPr rtlCol="0" anchor="ctr"/>
+          <a:lstStyle/>
+          <a:p>
+            <a:pPr algn="ctr"/>
+          </a:p>
+        </p:txBody>
+      </p:sp>
+      <p:sp>
+        <p:nvSpPr>
+          <p:cNvPr id="12" name="Rounded Rectangle 11"/>
+          <p:cNvSpPr/>
+          <p:nvPr/>
+        </p:nvSpPr>
+        <p:spPr>
+          <a:xfrm>
+            <a:off x="731519" y="1508760"/>
+            <a:ext cx="10728655" cy="32004"/>
+          </a:xfrm>
+          <a:prstGeom prst="roundRect">
+            <a:avLst>
+              <a:gd name="adj" fmla="val 50000"/>
+            </a:avLst>
+          </a:prstGeom>
+          <a:solidFill>
+            <a:srgbClr val="FFFFFF">
+              <a:alpha val="85000"/>
+            </a:srgbClr>
+          </a:solidFill>
+          <a:ln>
+            <a:noFill/>
+          </a:ln>
+          <a:effectLst/>
+        </p:spPr>
+        <p:style>
+          <a:lnRef idx="1">
+            <a:schemeClr val="accent1"/>
+          </a:lnRef>
+          <a:fillRef idx="3">
+            <a:schemeClr val="accent1"/>
+          </a:fillRef>
+          <a:effectRef idx="2">
+            <a:schemeClr val="accent1"/>
+          </a:effectRef>
+          <a:fontRef idx="minor">
+            <a:schemeClr val="lt1"/>
+          </a:fontRef>
+        </p:style>
+        <p:txBody>
+          <a:bodyPr rtlCol="0" anchor="ctr"/>
+          <a:lstStyle/>
+          <a:p>
+            <a:pPr algn="ctr"/>
+          </a:p>
+        </p:txBody>
+      </p:sp>
+      <p:sp>
+        <p:nvSpPr>
+          <p:cNvPr id="13" name="TextBox 12"/>
           <p:cNvSpPr txBox="1"/>
           <p:nvPr/>
         </p:nvSpPr>
@@ -14844,7 +16314,7 @@
       </p:sp>
       <p:sp>
         <p:nvSpPr>
-          <p:cNvPr id="12" name="Rounded Rectangle 11"/>
+          <p:cNvPr id="14" name="Rounded Rectangle 13"/>
           <p:cNvSpPr/>
           <p:nvPr/>
         </p:nvSpPr>
@@ -14900,7 +16370,7 @@
       </p:sp>
       <p:sp>
         <p:nvSpPr>
-          <p:cNvPr id="13" name="Oval 12"/>
+          <p:cNvPr id="15" name="Oval 14"/>
           <p:cNvSpPr/>
           <p:nvPr/>
         </p:nvSpPr>
@@ -14953,7 +16423,7 @@
       </p:sp>
       <p:sp>
         <p:nvSpPr>
-          <p:cNvPr id="14" name="TextBox 13"/>
+          <p:cNvPr id="16" name="TextBox 15"/>
           <p:cNvSpPr txBox="1"/>
           <p:nvPr/>
         </p:nvSpPr>
@@ -14987,7 +16457,7 @@
       </p:sp>
       <p:sp>
         <p:nvSpPr>
-          <p:cNvPr id="15" name="Rounded Rectangle 14"/>
+          <p:cNvPr id="17" name="Rounded Rectangle 16"/>
           <p:cNvSpPr/>
           <p:nvPr/>
         </p:nvSpPr>
@@ -15043,7 +16513,7 @@
       </p:sp>
       <p:sp>
         <p:nvSpPr>
-          <p:cNvPr id="16" name="Oval 15"/>
+          <p:cNvPr id="18" name="Oval 17"/>
           <p:cNvSpPr/>
           <p:nvPr/>
         </p:nvSpPr>
@@ -15096,7 +16566,7 @@
       </p:sp>
       <p:sp>
         <p:nvSpPr>
-          <p:cNvPr id="17" name="TextBox 16"/>
+          <p:cNvPr id="19" name="TextBox 18"/>
           <p:cNvSpPr txBox="1"/>
           <p:nvPr/>
         </p:nvSpPr>
@@ -15130,7 +16600,7 @@
       </p:sp>
       <p:sp>
         <p:nvSpPr>
-          <p:cNvPr id="18" name="Rounded Rectangle 17"/>
+          <p:cNvPr id="20" name="Rounded Rectangle 19"/>
           <p:cNvSpPr/>
           <p:nvPr/>
         </p:nvSpPr>
@@ -15186,7 +16656,7 @@
       </p:sp>
       <p:sp>
         <p:nvSpPr>
-          <p:cNvPr id="19" name="Oval 18"/>
+          <p:cNvPr id="21" name="Oval 20"/>
           <p:cNvSpPr/>
           <p:nvPr/>
         </p:nvSpPr>
@@ -15239,7 +16709,7 @@
       </p:sp>
       <p:sp>
         <p:nvSpPr>
-          <p:cNvPr id="20" name="TextBox 19"/>
+          <p:cNvPr id="22" name="TextBox 21"/>
           <p:cNvSpPr txBox="1"/>
           <p:nvPr/>
         </p:nvSpPr>
@@ -15273,7 +16743,7 @@
       </p:sp>
       <p:sp>
         <p:nvSpPr>
-          <p:cNvPr id="21" name="Rounded Rectangle 20"/>
+          <p:cNvPr id="23" name="Rounded Rectangle 22"/>
           <p:cNvSpPr/>
           <p:nvPr/>
         </p:nvSpPr>
@@ -15329,7 +16799,7 @@
       </p:sp>
       <p:sp>
         <p:nvSpPr>
-          <p:cNvPr id="22" name="Oval 21"/>
+          <p:cNvPr id="24" name="Oval 23"/>
           <p:cNvSpPr/>
           <p:nvPr/>
         </p:nvSpPr>
@@ -15382,7 +16852,7 @@
       </p:sp>
       <p:sp>
         <p:nvSpPr>
-          <p:cNvPr id="23" name="TextBox 22"/>
+          <p:cNvPr id="25" name="TextBox 24"/>
           <p:cNvSpPr txBox="1"/>
           <p:nvPr/>
         </p:nvSpPr>
@@ -15797,7 +17267,111 @@
       </p:pic>
       <p:sp>
         <p:nvSpPr>
-          <p:cNvPr id="11" name="TextBox 10"/>
+          <p:cNvPr id="11" name="Rounded Rectangle 10"/>
+          <p:cNvSpPr/>
+          <p:nvPr/>
+        </p:nvSpPr>
+        <p:spPr>
+          <a:xfrm>
+            <a:off x="411479" y="1444752"/>
+            <a:ext cx="11368735" cy="4800600"/>
+          </a:xfrm>
+          <a:prstGeom prst="roundRect">
+            <a:avLst>
+              <a:gd name="adj" fmla="val 4000"/>
+            </a:avLst>
+          </a:prstGeom>
+          <a:solidFill>
+            <a:srgbClr val="FFFFFF">
+              <a:alpha val="84000"/>
+            </a:srgbClr>
+          </a:solidFill>
+          <a:ln w="19050">
+            <a:solidFill>
+              <a:srgbClr val="FFFFFF"/>
+            </a:solidFill>
+          </a:ln>
+          <a:effectLst>
+            <a:outerShdw blurRad="203200" dist="50800" dir="5400000" algn="t" rotWithShape="0">
+              <a:srgbClr val="1A2340">
+                <a:alpha val="20000"/>
+              </a:srgbClr>
+            </a:outerShdw>
+          </a:effectLst>
+        </p:spPr>
+        <p:style>
+          <a:lnRef idx="1">
+            <a:schemeClr val="accent1"/>
+          </a:lnRef>
+          <a:fillRef idx="3">
+            <a:schemeClr val="accent1"/>
+          </a:fillRef>
+          <a:effectRef idx="2">
+            <a:schemeClr val="accent1"/>
+          </a:effectRef>
+          <a:fontRef idx="minor">
+            <a:schemeClr val="lt1"/>
+          </a:fontRef>
+        </p:style>
+        <p:txBody>
+          <a:bodyPr rtlCol="0" anchor="ctr"/>
+          <a:lstStyle/>
+          <a:p>
+            <a:pPr algn="ctr"/>
+          </a:p>
+        </p:txBody>
+      </p:sp>
+      <p:sp>
+        <p:nvSpPr>
+          <p:cNvPr id="12" name="Rounded Rectangle 11"/>
+          <p:cNvSpPr/>
+          <p:nvPr/>
+        </p:nvSpPr>
+        <p:spPr>
+          <a:xfrm>
+            <a:off x="731519" y="1508760"/>
+            <a:ext cx="10728655" cy="32004"/>
+          </a:xfrm>
+          <a:prstGeom prst="roundRect">
+            <a:avLst>
+              <a:gd name="adj" fmla="val 50000"/>
+            </a:avLst>
+          </a:prstGeom>
+          <a:solidFill>
+            <a:srgbClr val="FFFFFF">
+              <a:alpha val="85000"/>
+            </a:srgbClr>
+          </a:solidFill>
+          <a:ln>
+            <a:noFill/>
+          </a:ln>
+          <a:effectLst/>
+        </p:spPr>
+        <p:style>
+          <a:lnRef idx="1">
+            <a:schemeClr val="accent1"/>
+          </a:lnRef>
+          <a:fillRef idx="3">
+            <a:schemeClr val="accent1"/>
+          </a:fillRef>
+          <a:effectRef idx="2">
+            <a:schemeClr val="accent1"/>
+          </a:effectRef>
+          <a:fontRef idx="minor">
+            <a:schemeClr val="lt1"/>
+          </a:fontRef>
+        </p:style>
+        <p:txBody>
+          <a:bodyPr rtlCol="0" anchor="ctr"/>
+          <a:lstStyle/>
+          <a:p>
+            <a:pPr algn="ctr"/>
+          </a:p>
+        </p:txBody>
+      </p:sp>
+      <p:sp>
+        <p:nvSpPr>
+          <p:cNvPr id="13" name="TextBox 12"/>
           <p:cNvSpPr txBox="1"/>
           <p:nvPr/>
         </p:nvSpPr>
@@ -15831,7 +17405,7 @@
       </p:sp>
       <p:sp>
         <p:nvSpPr>
-          <p:cNvPr id="12" name="Rounded Rectangle 11"/>
+          <p:cNvPr id="14" name="Rounded Rectangle 13"/>
           <p:cNvSpPr/>
           <p:nvPr/>
         </p:nvSpPr>
@@ -15887,7 +17461,7 @@
       </p:sp>
       <p:sp>
         <p:nvSpPr>
-          <p:cNvPr id="13" name="Oval 12"/>
+          <p:cNvPr id="15" name="Oval 14"/>
           <p:cNvSpPr/>
           <p:nvPr/>
         </p:nvSpPr>
@@ -15940,7 +17514,7 @@
       </p:sp>
       <p:sp>
         <p:nvSpPr>
-          <p:cNvPr id="14" name="TextBox 13"/>
+          <p:cNvPr id="16" name="TextBox 15"/>
           <p:cNvSpPr txBox="1"/>
           <p:nvPr/>
         </p:nvSpPr>
@@ -15974,7 +17548,7 @@
       </p:sp>
       <p:sp>
         <p:nvSpPr>
-          <p:cNvPr id="15" name="Rounded Rectangle 14"/>
+          <p:cNvPr id="17" name="Rounded Rectangle 16"/>
           <p:cNvSpPr/>
           <p:nvPr/>
         </p:nvSpPr>
@@ -16030,7 +17604,7 @@
       </p:sp>
       <p:sp>
         <p:nvSpPr>
-          <p:cNvPr id="16" name="Oval 15"/>
+          <p:cNvPr id="18" name="Oval 17"/>
           <p:cNvSpPr/>
           <p:nvPr/>
         </p:nvSpPr>
@@ -16083,7 +17657,7 @@
       </p:sp>
       <p:sp>
         <p:nvSpPr>
-          <p:cNvPr id="17" name="TextBox 16"/>
+          <p:cNvPr id="19" name="TextBox 18"/>
           <p:cNvSpPr txBox="1"/>
           <p:nvPr/>
         </p:nvSpPr>
@@ -16117,7 +17691,7 @@
       </p:sp>
       <p:sp>
         <p:nvSpPr>
-          <p:cNvPr id="18" name="Rounded Rectangle 17"/>
+          <p:cNvPr id="20" name="Rounded Rectangle 19"/>
           <p:cNvSpPr/>
           <p:nvPr/>
         </p:nvSpPr>
@@ -16173,7 +17747,7 @@
       </p:sp>
       <p:sp>
         <p:nvSpPr>
-          <p:cNvPr id="19" name="Oval 18"/>
+          <p:cNvPr id="21" name="Oval 20"/>
           <p:cNvSpPr/>
           <p:nvPr/>
         </p:nvSpPr>
@@ -16226,7 +17800,7 @@
       </p:sp>
       <p:sp>
         <p:nvSpPr>
-          <p:cNvPr id="20" name="TextBox 19"/>
+          <p:cNvPr id="22" name="TextBox 21"/>
           <p:cNvSpPr txBox="1"/>
           <p:nvPr/>
         </p:nvSpPr>
@@ -16260,7 +17834,7 @@
       </p:sp>
       <p:sp>
         <p:nvSpPr>
-          <p:cNvPr id="21" name="Rounded Rectangle 20"/>
+          <p:cNvPr id="23" name="Rounded Rectangle 22"/>
           <p:cNvSpPr/>
           <p:nvPr/>
         </p:nvSpPr>
@@ -16319,7 +17893,7 @@
       </p:sp>
       <p:sp>
         <p:nvSpPr>
-          <p:cNvPr id="22" name="Oval 21"/>
+          <p:cNvPr id="24" name="Oval 23"/>
           <p:cNvSpPr/>
           <p:nvPr/>
         </p:nvSpPr>
@@ -16372,7 +17946,7 @@
       </p:sp>
       <p:sp>
         <p:nvSpPr>
-          <p:cNvPr id="23" name="TextBox 22"/>
+          <p:cNvPr id="25" name="TextBox 24"/>
           <p:cNvSpPr txBox="1"/>
           <p:nvPr/>
         </p:nvSpPr>
@@ -16406,7 +17980,7 @@
       </p:sp>
       <p:sp>
         <p:nvSpPr>
-          <p:cNvPr id="24" name="TextBox 23"/>
+          <p:cNvPr id="26" name="TextBox 25"/>
           <p:cNvSpPr txBox="1"/>
           <p:nvPr/>
         </p:nvSpPr>
@@ -16830,7 +18404,111 @@
       </p:pic>
       <p:sp>
         <p:nvSpPr>
-          <p:cNvPr id="11" name="TextBox 10"/>
+          <p:cNvPr id="11" name="Rounded Rectangle 10"/>
+          <p:cNvSpPr/>
+          <p:nvPr/>
+        </p:nvSpPr>
+        <p:spPr>
+          <a:xfrm>
+            <a:off x="411479" y="1444752"/>
+            <a:ext cx="11368735" cy="4800600"/>
+          </a:xfrm>
+          <a:prstGeom prst="roundRect">
+            <a:avLst>
+              <a:gd name="adj" fmla="val 4000"/>
+            </a:avLst>
+          </a:prstGeom>
+          <a:solidFill>
+            <a:srgbClr val="FFFFFF">
+              <a:alpha val="84000"/>
+            </a:srgbClr>
+          </a:solidFill>
+          <a:ln w="19050">
+            <a:solidFill>
+              <a:srgbClr val="FFFFFF"/>
+            </a:solidFill>
+          </a:ln>
+          <a:effectLst>
+            <a:outerShdw blurRad="203200" dist="50800" dir="5400000" algn="t" rotWithShape="0">
+              <a:srgbClr val="1A2340">
+                <a:alpha val="20000"/>
+              </a:srgbClr>
+            </a:outerShdw>
+          </a:effectLst>
+        </p:spPr>
+        <p:style>
+          <a:lnRef idx="1">
+            <a:schemeClr val="accent1"/>
+          </a:lnRef>
+          <a:fillRef idx="3">
+            <a:schemeClr val="accent1"/>
+          </a:fillRef>
+          <a:effectRef idx="2">
+            <a:schemeClr val="accent1"/>
+          </a:effectRef>
+          <a:fontRef idx="minor">
+            <a:schemeClr val="lt1"/>
+          </a:fontRef>
+        </p:style>
+        <p:txBody>
+          <a:bodyPr rtlCol="0" anchor="ctr"/>
+          <a:lstStyle/>
+          <a:p>
+            <a:pPr algn="ctr"/>
+          </a:p>
+        </p:txBody>
+      </p:sp>
+      <p:sp>
+        <p:nvSpPr>
+          <p:cNvPr id="12" name="Rounded Rectangle 11"/>
+          <p:cNvSpPr/>
+          <p:nvPr/>
+        </p:nvSpPr>
+        <p:spPr>
+          <a:xfrm>
+            <a:off x="731519" y="1508760"/>
+            <a:ext cx="10728655" cy="32004"/>
+          </a:xfrm>
+          <a:prstGeom prst="roundRect">
+            <a:avLst>
+              <a:gd name="adj" fmla="val 50000"/>
+            </a:avLst>
+          </a:prstGeom>
+          <a:solidFill>
+            <a:srgbClr val="FFFFFF">
+              <a:alpha val="85000"/>
+            </a:srgbClr>
+          </a:solidFill>
+          <a:ln>
+            <a:noFill/>
+          </a:ln>
+          <a:effectLst/>
+        </p:spPr>
+        <p:style>
+          <a:lnRef idx="1">
+            <a:schemeClr val="accent1"/>
+          </a:lnRef>
+          <a:fillRef idx="3">
+            <a:schemeClr val="accent1"/>
+          </a:fillRef>
+          <a:effectRef idx="2">
+            <a:schemeClr val="accent1"/>
+          </a:effectRef>
+          <a:fontRef idx="minor">
+            <a:schemeClr val="lt1"/>
+          </a:fontRef>
+        </p:style>
+        <p:txBody>
+          <a:bodyPr rtlCol="0" anchor="ctr"/>
+          <a:lstStyle/>
+          <a:p>
+            <a:pPr algn="ctr"/>
+          </a:p>
+        </p:txBody>
+      </p:sp>
+      <p:sp>
+        <p:nvSpPr>
+          <p:cNvPr id="13" name="TextBox 12"/>
           <p:cNvSpPr txBox="1"/>
           <p:nvPr/>
         </p:nvSpPr>
@@ -16864,7 +18542,7 @@
       </p:sp>
       <p:sp>
         <p:nvSpPr>
-          <p:cNvPr id="12" name="Rounded Rectangle 11"/>
+          <p:cNvPr id="14" name="Rounded Rectangle 13"/>
           <p:cNvSpPr/>
           <p:nvPr/>
         </p:nvSpPr>
@@ -16920,7 +18598,7 @@
       </p:sp>
       <p:sp>
         <p:nvSpPr>
-          <p:cNvPr id="13" name="Oval 12"/>
+          <p:cNvPr id="15" name="Oval 14"/>
           <p:cNvSpPr/>
           <p:nvPr/>
         </p:nvSpPr>
@@ -16973,7 +18651,7 @@
       </p:sp>
       <p:sp>
         <p:nvSpPr>
-          <p:cNvPr id="14" name="TextBox 13"/>
+          <p:cNvPr id="16" name="TextBox 15"/>
           <p:cNvSpPr txBox="1"/>
           <p:nvPr/>
         </p:nvSpPr>
@@ -17007,7 +18685,7 @@
       </p:sp>
       <p:sp>
         <p:nvSpPr>
-          <p:cNvPr id="15" name="Rounded Rectangle 14"/>
+          <p:cNvPr id="17" name="Rounded Rectangle 16"/>
           <p:cNvSpPr/>
           <p:nvPr/>
         </p:nvSpPr>
@@ -17063,7 +18741,7 @@
       </p:sp>
       <p:sp>
         <p:nvSpPr>
-          <p:cNvPr id="16" name="Oval 15"/>
+          <p:cNvPr id="18" name="Oval 17"/>
           <p:cNvSpPr/>
           <p:nvPr/>
         </p:nvSpPr>
@@ -17116,7 +18794,7 @@
       </p:sp>
       <p:sp>
         <p:nvSpPr>
-          <p:cNvPr id="17" name="TextBox 16"/>
+          <p:cNvPr id="19" name="TextBox 18"/>
           <p:cNvSpPr txBox="1"/>
           <p:nvPr/>
         </p:nvSpPr>
@@ -17150,7 +18828,7 @@
       </p:sp>
       <p:sp>
         <p:nvSpPr>
-          <p:cNvPr id="18" name="Rounded Rectangle 17"/>
+          <p:cNvPr id="20" name="Rounded Rectangle 19"/>
           <p:cNvSpPr/>
           <p:nvPr/>
         </p:nvSpPr>
@@ -17206,7 +18884,7 @@
       </p:sp>
       <p:sp>
         <p:nvSpPr>
-          <p:cNvPr id="19" name="Oval 18"/>
+          <p:cNvPr id="21" name="Oval 20"/>
           <p:cNvSpPr/>
           <p:nvPr/>
         </p:nvSpPr>
@@ -17259,7 +18937,7 @@
       </p:sp>
       <p:sp>
         <p:nvSpPr>
-          <p:cNvPr id="20" name="TextBox 19"/>
+          <p:cNvPr id="22" name="TextBox 21"/>
           <p:cNvSpPr txBox="1"/>
           <p:nvPr/>
         </p:nvSpPr>
@@ -17293,7 +18971,7 @@
       </p:sp>
       <p:sp>
         <p:nvSpPr>
-          <p:cNvPr id="21" name="Rounded Rectangle 20"/>
+          <p:cNvPr id="23" name="Rounded Rectangle 22"/>
           <p:cNvSpPr/>
           <p:nvPr/>
         </p:nvSpPr>
@@ -17349,7 +19027,7 @@
       </p:sp>
       <p:sp>
         <p:nvSpPr>
-          <p:cNvPr id="22" name="Oval 21"/>
+          <p:cNvPr id="24" name="Oval 23"/>
           <p:cNvSpPr/>
           <p:nvPr/>
         </p:nvSpPr>
@@ -17402,7 +19080,7 @@
       </p:sp>
       <p:sp>
         <p:nvSpPr>
-          <p:cNvPr id="23" name="TextBox 22"/>
+          <p:cNvPr id="25" name="TextBox 24"/>
           <p:cNvSpPr txBox="1"/>
           <p:nvPr/>
         </p:nvSpPr>
@@ -17817,7 +19495,111 @@
       </p:pic>
       <p:sp>
         <p:nvSpPr>
-          <p:cNvPr id="11" name="TextBox 10"/>
+          <p:cNvPr id="11" name="Rounded Rectangle 10"/>
+          <p:cNvSpPr/>
+          <p:nvPr/>
+        </p:nvSpPr>
+        <p:spPr>
+          <a:xfrm>
+            <a:off x="411479" y="1444752"/>
+            <a:ext cx="11368735" cy="4800600"/>
+          </a:xfrm>
+          <a:prstGeom prst="roundRect">
+            <a:avLst>
+              <a:gd name="adj" fmla="val 4000"/>
+            </a:avLst>
+          </a:prstGeom>
+          <a:solidFill>
+            <a:srgbClr val="FFFFFF">
+              <a:alpha val="84000"/>
+            </a:srgbClr>
+          </a:solidFill>
+          <a:ln w="19050">
+            <a:solidFill>
+              <a:srgbClr val="FFFFFF"/>
+            </a:solidFill>
+          </a:ln>
+          <a:effectLst>
+            <a:outerShdw blurRad="203200" dist="50800" dir="5400000" algn="t" rotWithShape="0">
+              <a:srgbClr val="1A2340">
+                <a:alpha val="20000"/>
+              </a:srgbClr>
+            </a:outerShdw>
+          </a:effectLst>
+        </p:spPr>
+        <p:style>
+          <a:lnRef idx="1">
+            <a:schemeClr val="accent1"/>
+          </a:lnRef>
+          <a:fillRef idx="3">
+            <a:schemeClr val="accent1"/>
+          </a:fillRef>
+          <a:effectRef idx="2">
+            <a:schemeClr val="accent1"/>
+          </a:effectRef>
+          <a:fontRef idx="minor">
+            <a:schemeClr val="lt1"/>
+          </a:fontRef>
+        </p:style>
+        <p:txBody>
+          <a:bodyPr rtlCol="0" anchor="ctr"/>
+          <a:lstStyle/>
+          <a:p>
+            <a:pPr algn="ctr"/>
+          </a:p>
+        </p:txBody>
+      </p:sp>
+      <p:sp>
+        <p:nvSpPr>
+          <p:cNvPr id="12" name="Rounded Rectangle 11"/>
+          <p:cNvSpPr/>
+          <p:nvPr/>
+        </p:nvSpPr>
+        <p:spPr>
+          <a:xfrm>
+            <a:off x="731519" y="1508760"/>
+            <a:ext cx="10728655" cy="32004"/>
+          </a:xfrm>
+          <a:prstGeom prst="roundRect">
+            <a:avLst>
+              <a:gd name="adj" fmla="val 50000"/>
+            </a:avLst>
+          </a:prstGeom>
+          <a:solidFill>
+            <a:srgbClr val="FFFFFF">
+              <a:alpha val="85000"/>
+            </a:srgbClr>
+          </a:solidFill>
+          <a:ln>
+            <a:noFill/>
+          </a:ln>
+          <a:effectLst/>
+        </p:spPr>
+        <p:style>
+          <a:lnRef idx="1">
+            <a:schemeClr val="accent1"/>
+          </a:lnRef>
+          <a:fillRef idx="3">
+            <a:schemeClr val="accent1"/>
+          </a:fillRef>
+          <a:effectRef idx="2">
+            <a:schemeClr val="accent1"/>
+          </a:effectRef>
+          <a:fontRef idx="minor">
+            <a:schemeClr val="lt1"/>
+          </a:fontRef>
+        </p:style>
+        <p:txBody>
+          <a:bodyPr rtlCol="0" anchor="ctr"/>
+          <a:lstStyle/>
+          <a:p>
+            <a:pPr algn="ctr"/>
+          </a:p>
+        </p:txBody>
+      </p:sp>
+      <p:sp>
+        <p:nvSpPr>
+          <p:cNvPr id="13" name="TextBox 12"/>
           <p:cNvSpPr txBox="1"/>
           <p:nvPr/>
         </p:nvSpPr>
@@ -17851,7 +19633,7 @@
       </p:sp>
       <p:sp>
         <p:nvSpPr>
-          <p:cNvPr id="12" name="Rounded Rectangle 11"/>
+          <p:cNvPr id="14" name="Rounded Rectangle 13"/>
           <p:cNvSpPr/>
           <p:nvPr/>
         </p:nvSpPr>
@@ -17910,7 +19692,7 @@
       </p:sp>
       <p:sp>
         <p:nvSpPr>
-          <p:cNvPr id="13" name="Oval 12"/>
+          <p:cNvPr id="15" name="Oval 14"/>
           <p:cNvSpPr/>
           <p:nvPr/>
         </p:nvSpPr>
@@ -17963,7 +19745,7 @@
       </p:sp>
       <p:sp>
         <p:nvSpPr>
-          <p:cNvPr id="14" name="TextBox 13"/>
+          <p:cNvPr id="16" name="TextBox 15"/>
           <p:cNvSpPr txBox="1"/>
           <p:nvPr/>
         </p:nvSpPr>
@@ -17997,7 +19779,7 @@
       </p:sp>
       <p:sp>
         <p:nvSpPr>
-          <p:cNvPr id="15" name="Rounded Rectangle 14"/>
+          <p:cNvPr id="17" name="Rounded Rectangle 16"/>
           <p:cNvSpPr/>
           <p:nvPr/>
         </p:nvSpPr>
@@ -18053,7 +19835,7 @@
       </p:sp>
       <p:sp>
         <p:nvSpPr>
-          <p:cNvPr id="16" name="Oval 15"/>
+          <p:cNvPr id="18" name="Oval 17"/>
           <p:cNvSpPr/>
           <p:nvPr/>
         </p:nvSpPr>
@@ -18106,7 +19888,7 @@
       </p:sp>
       <p:sp>
         <p:nvSpPr>
-          <p:cNvPr id="17" name="TextBox 16"/>
+          <p:cNvPr id="19" name="TextBox 18"/>
           <p:cNvSpPr txBox="1"/>
           <p:nvPr/>
         </p:nvSpPr>
@@ -18140,7 +19922,7 @@
       </p:sp>
       <p:sp>
         <p:nvSpPr>
-          <p:cNvPr id="18" name="Rounded Rectangle 17"/>
+          <p:cNvPr id="20" name="Rounded Rectangle 19"/>
           <p:cNvSpPr/>
           <p:nvPr/>
         </p:nvSpPr>
@@ -18196,7 +19978,7 @@
       </p:sp>
       <p:sp>
         <p:nvSpPr>
-          <p:cNvPr id="19" name="Oval 18"/>
+          <p:cNvPr id="21" name="Oval 20"/>
           <p:cNvSpPr/>
           <p:nvPr/>
         </p:nvSpPr>
@@ -18249,7 +20031,7 @@
       </p:sp>
       <p:sp>
         <p:nvSpPr>
-          <p:cNvPr id="20" name="TextBox 19"/>
+          <p:cNvPr id="22" name="TextBox 21"/>
           <p:cNvSpPr txBox="1"/>
           <p:nvPr/>
         </p:nvSpPr>
@@ -18283,7 +20065,7 @@
       </p:sp>
       <p:sp>
         <p:nvSpPr>
-          <p:cNvPr id="21" name="Rounded Rectangle 20"/>
+          <p:cNvPr id="23" name="Rounded Rectangle 22"/>
           <p:cNvSpPr/>
           <p:nvPr/>
         </p:nvSpPr>
@@ -18339,7 +20121,7 @@
       </p:sp>
       <p:sp>
         <p:nvSpPr>
-          <p:cNvPr id="22" name="Oval 21"/>
+          <p:cNvPr id="24" name="Oval 23"/>
           <p:cNvSpPr/>
           <p:nvPr/>
         </p:nvSpPr>
@@ -18392,7 +20174,7 @@
       </p:sp>
       <p:sp>
         <p:nvSpPr>
-          <p:cNvPr id="23" name="TextBox 22"/>
+          <p:cNvPr id="25" name="TextBox 24"/>
           <p:cNvSpPr txBox="1"/>
           <p:nvPr/>
         </p:nvSpPr>
@@ -18426,7 +20208,7 @@
       </p:sp>
       <p:sp>
         <p:nvSpPr>
-          <p:cNvPr id="24" name="TextBox 23"/>
+          <p:cNvPr id="26" name="TextBox 25"/>
           <p:cNvSpPr txBox="1"/>
           <p:nvPr/>
         </p:nvSpPr>
@@ -19625,7 +21407,111 @@
       </p:pic>
       <p:sp>
         <p:nvSpPr>
-          <p:cNvPr id="11" name="Oval 10"/>
+          <p:cNvPr id="11" name="Rounded Rectangle 10"/>
+          <p:cNvSpPr/>
+          <p:nvPr/>
+        </p:nvSpPr>
+        <p:spPr>
+          <a:xfrm>
+            <a:off x="411479" y="1444752"/>
+            <a:ext cx="11368735" cy="4800600"/>
+          </a:xfrm>
+          <a:prstGeom prst="roundRect">
+            <a:avLst>
+              <a:gd name="adj" fmla="val 4000"/>
+            </a:avLst>
+          </a:prstGeom>
+          <a:solidFill>
+            <a:srgbClr val="FFFFFF">
+              <a:alpha val="84000"/>
+            </a:srgbClr>
+          </a:solidFill>
+          <a:ln w="19050">
+            <a:solidFill>
+              <a:srgbClr val="FFFFFF"/>
+            </a:solidFill>
+          </a:ln>
+          <a:effectLst>
+            <a:outerShdw blurRad="203200" dist="50800" dir="5400000" algn="t" rotWithShape="0">
+              <a:srgbClr val="1A2340">
+                <a:alpha val="20000"/>
+              </a:srgbClr>
+            </a:outerShdw>
+          </a:effectLst>
+        </p:spPr>
+        <p:style>
+          <a:lnRef idx="1">
+            <a:schemeClr val="accent1"/>
+          </a:lnRef>
+          <a:fillRef idx="3">
+            <a:schemeClr val="accent1"/>
+          </a:fillRef>
+          <a:effectRef idx="2">
+            <a:schemeClr val="accent1"/>
+          </a:effectRef>
+          <a:fontRef idx="minor">
+            <a:schemeClr val="lt1"/>
+          </a:fontRef>
+        </p:style>
+        <p:txBody>
+          <a:bodyPr rtlCol="0" anchor="ctr"/>
+          <a:lstStyle/>
+          <a:p>
+            <a:pPr algn="ctr"/>
+          </a:p>
+        </p:txBody>
+      </p:sp>
+      <p:sp>
+        <p:nvSpPr>
+          <p:cNvPr id="12" name="Rounded Rectangle 11"/>
+          <p:cNvSpPr/>
+          <p:nvPr/>
+        </p:nvSpPr>
+        <p:spPr>
+          <a:xfrm>
+            <a:off x="731519" y="1508760"/>
+            <a:ext cx="10728655" cy="32004"/>
+          </a:xfrm>
+          <a:prstGeom prst="roundRect">
+            <a:avLst>
+              <a:gd name="adj" fmla="val 50000"/>
+            </a:avLst>
+          </a:prstGeom>
+          <a:solidFill>
+            <a:srgbClr val="FFFFFF">
+              <a:alpha val="85000"/>
+            </a:srgbClr>
+          </a:solidFill>
+          <a:ln>
+            <a:noFill/>
+          </a:ln>
+          <a:effectLst/>
+        </p:spPr>
+        <p:style>
+          <a:lnRef idx="1">
+            <a:schemeClr val="accent1"/>
+          </a:lnRef>
+          <a:fillRef idx="3">
+            <a:schemeClr val="accent1"/>
+          </a:fillRef>
+          <a:effectRef idx="2">
+            <a:schemeClr val="accent1"/>
+          </a:effectRef>
+          <a:fontRef idx="minor">
+            <a:schemeClr val="lt1"/>
+          </a:fontRef>
+        </p:style>
+        <p:txBody>
+          <a:bodyPr rtlCol="0" anchor="ctr"/>
+          <a:lstStyle/>
+          <a:p>
+            <a:pPr algn="ctr"/>
+          </a:p>
+        </p:txBody>
+      </p:sp>
+      <p:sp>
+        <p:nvSpPr>
+          <p:cNvPr id="13" name="Oval 12"/>
           <p:cNvSpPr/>
           <p:nvPr/>
         </p:nvSpPr>
@@ -19678,7 +21564,7 @@
       </p:sp>
       <p:sp>
         <p:nvSpPr>
-          <p:cNvPr id="12" name="TextBox 11"/>
+          <p:cNvPr id="14" name="TextBox 13"/>
           <p:cNvSpPr txBox="1"/>
           <p:nvPr/>
         </p:nvSpPr>
@@ -19712,7 +21598,7 @@
       </p:sp>
       <p:sp>
         <p:nvSpPr>
-          <p:cNvPr id="13" name="Oval 12"/>
+          <p:cNvPr id="15" name="Oval 14"/>
           <p:cNvSpPr/>
           <p:nvPr/>
         </p:nvSpPr>
@@ -19765,7 +21651,7 @@
       </p:sp>
       <p:sp>
         <p:nvSpPr>
-          <p:cNvPr id="14" name="TextBox 13"/>
+          <p:cNvPr id="16" name="TextBox 15"/>
           <p:cNvSpPr txBox="1"/>
           <p:nvPr/>
         </p:nvSpPr>
@@ -19799,7 +21685,7 @@
       </p:sp>
       <p:sp>
         <p:nvSpPr>
-          <p:cNvPr id="15" name="Oval 14"/>
+          <p:cNvPr id="17" name="Oval 16"/>
           <p:cNvSpPr/>
           <p:nvPr/>
         </p:nvSpPr>
@@ -19852,7 +21738,7 @@
       </p:sp>
       <p:sp>
         <p:nvSpPr>
-          <p:cNvPr id="16" name="TextBox 15"/>
+          <p:cNvPr id="18" name="TextBox 17"/>
           <p:cNvSpPr txBox="1"/>
           <p:nvPr/>
         </p:nvSpPr>
@@ -19886,7 +21772,7 @@
       </p:sp>
       <p:sp>
         <p:nvSpPr>
-          <p:cNvPr id="17" name="Oval 16"/>
+          <p:cNvPr id="19" name="Oval 18"/>
           <p:cNvSpPr/>
           <p:nvPr/>
         </p:nvSpPr>
@@ -19939,7 +21825,7 @@
       </p:sp>
       <p:sp>
         <p:nvSpPr>
-          <p:cNvPr id="18" name="TextBox 17"/>
+          <p:cNvPr id="20" name="TextBox 19"/>
           <p:cNvSpPr txBox="1"/>
           <p:nvPr/>
         </p:nvSpPr>
@@ -19973,7 +21859,7 @@
       </p:sp>
       <p:sp>
         <p:nvSpPr>
-          <p:cNvPr id="19" name="Oval 18"/>
+          <p:cNvPr id="21" name="Oval 20"/>
           <p:cNvSpPr/>
           <p:nvPr/>
         </p:nvSpPr>
@@ -20026,7 +21912,7 @@
       </p:sp>
       <p:sp>
         <p:nvSpPr>
-          <p:cNvPr id="20" name="TextBox 19"/>
+          <p:cNvPr id="22" name="TextBox 21"/>
           <p:cNvSpPr txBox="1"/>
           <p:nvPr/>
         </p:nvSpPr>
@@ -20060,7 +21946,7 @@
       </p:sp>
       <p:sp>
         <p:nvSpPr>
-          <p:cNvPr id="21" name="Oval 20"/>
+          <p:cNvPr id="23" name="Oval 22"/>
           <p:cNvSpPr/>
           <p:nvPr/>
         </p:nvSpPr>
@@ -20113,7 +21999,7 @@
       </p:sp>
       <p:sp>
         <p:nvSpPr>
-          <p:cNvPr id="22" name="TextBox 21"/>
+          <p:cNvPr id="24" name="TextBox 23"/>
           <p:cNvSpPr txBox="1"/>
           <p:nvPr/>
         </p:nvSpPr>
@@ -20147,7 +22033,7 @@
       </p:sp>
       <p:sp>
         <p:nvSpPr>
-          <p:cNvPr id="23" name="Oval 22"/>
+          <p:cNvPr id="25" name="Oval 24"/>
           <p:cNvSpPr/>
           <p:nvPr/>
         </p:nvSpPr>
@@ -20200,7 +22086,7 @@
       </p:sp>
       <p:sp>
         <p:nvSpPr>
-          <p:cNvPr id="24" name="TextBox 23"/>
+          <p:cNvPr id="26" name="TextBox 25"/>
           <p:cNvSpPr txBox="1"/>
           <p:nvPr/>
         </p:nvSpPr>
@@ -20234,7 +22120,7 @@
       </p:sp>
       <p:sp>
         <p:nvSpPr>
-          <p:cNvPr id="25" name="Oval 24"/>
+          <p:cNvPr id="27" name="Oval 26"/>
           <p:cNvSpPr/>
           <p:nvPr/>
         </p:nvSpPr>
@@ -20287,7 +22173,7 @@
       </p:sp>
       <p:sp>
         <p:nvSpPr>
-          <p:cNvPr id="26" name="TextBox 25"/>
+          <p:cNvPr id="28" name="TextBox 27"/>
           <p:cNvSpPr txBox="1"/>
           <p:nvPr/>
         </p:nvSpPr>
@@ -20702,7 +22588,111 @@
       </p:pic>
       <p:sp>
         <p:nvSpPr>
-          <p:cNvPr id="11" name="Oval 10"/>
+          <p:cNvPr id="11" name="Rounded Rectangle 10"/>
+          <p:cNvSpPr/>
+          <p:nvPr/>
+        </p:nvSpPr>
+        <p:spPr>
+          <a:xfrm>
+            <a:off x="411479" y="1444752"/>
+            <a:ext cx="11368735" cy="4800600"/>
+          </a:xfrm>
+          <a:prstGeom prst="roundRect">
+            <a:avLst>
+              <a:gd name="adj" fmla="val 4000"/>
+            </a:avLst>
+          </a:prstGeom>
+          <a:solidFill>
+            <a:srgbClr val="FFFFFF">
+              <a:alpha val="84000"/>
+            </a:srgbClr>
+          </a:solidFill>
+          <a:ln w="19050">
+            <a:solidFill>
+              <a:srgbClr val="FFFFFF"/>
+            </a:solidFill>
+          </a:ln>
+          <a:effectLst>
+            <a:outerShdw blurRad="203200" dist="50800" dir="5400000" algn="t" rotWithShape="0">
+              <a:srgbClr val="1A2340">
+                <a:alpha val="20000"/>
+              </a:srgbClr>
+            </a:outerShdw>
+          </a:effectLst>
+        </p:spPr>
+        <p:style>
+          <a:lnRef idx="1">
+            <a:schemeClr val="accent1"/>
+          </a:lnRef>
+          <a:fillRef idx="3">
+            <a:schemeClr val="accent1"/>
+          </a:fillRef>
+          <a:effectRef idx="2">
+            <a:schemeClr val="accent1"/>
+          </a:effectRef>
+          <a:fontRef idx="minor">
+            <a:schemeClr val="lt1"/>
+          </a:fontRef>
+        </p:style>
+        <p:txBody>
+          <a:bodyPr rtlCol="0" anchor="ctr"/>
+          <a:lstStyle/>
+          <a:p>
+            <a:pPr algn="ctr"/>
+          </a:p>
+        </p:txBody>
+      </p:sp>
+      <p:sp>
+        <p:nvSpPr>
+          <p:cNvPr id="12" name="Rounded Rectangle 11"/>
+          <p:cNvSpPr/>
+          <p:nvPr/>
+        </p:nvSpPr>
+        <p:spPr>
+          <a:xfrm>
+            <a:off x="731519" y="1508760"/>
+            <a:ext cx="10728655" cy="32004"/>
+          </a:xfrm>
+          <a:prstGeom prst="roundRect">
+            <a:avLst>
+              <a:gd name="adj" fmla="val 50000"/>
+            </a:avLst>
+          </a:prstGeom>
+          <a:solidFill>
+            <a:srgbClr val="FFFFFF">
+              <a:alpha val="85000"/>
+            </a:srgbClr>
+          </a:solidFill>
+          <a:ln>
+            <a:noFill/>
+          </a:ln>
+          <a:effectLst/>
+        </p:spPr>
+        <p:style>
+          <a:lnRef idx="1">
+            <a:schemeClr val="accent1"/>
+          </a:lnRef>
+          <a:fillRef idx="3">
+            <a:schemeClr val="accent1"/>
+          </a:fillRef>
+          <a:effectRef idx="2">
+            <a:schemeClr val="accent1"/>
+          </a:effectRef>
+          <a:fontRef idx="minor">
+            <a:schemeClr val="lt1"/>
+          </a:fontRef>
+        </p:style>
+        <p:txBody>
+          <a:bodyPr rtlCol="0" anchor="ctr"/>
+          <a:lstStyle/>
+          <a:p>
+            <a:pPr algn="ctr"/>
+          </a:p>
+        </p:txBody>
+      </p:sp>
+      <p:sp>
+        <p:nvSpPr>
+          <p:cNvPr id="13" name="Oval 12"/>
           <p:cNvSpPr/>
           <p:nvPr/>
         </p:nvSpPr>
@@ -20755,7 +22745,7 @@
       </p:sp>
       <p:sp>
         <p:nvSpPr>
-          <p:cNvPr id="12" name="TextBox 11"/>
+          <p:cNvPr id="14" name="TextBox 13"/>
           <p:cNvSpPr txBox="1"/>
           <p:nvPr/>
         </p:nvSpPr>
@@ -20789,7 +22779,7 @@
       </p:sp>
       <p:sp>
         <p:nvSpPr>
-          <p:cNvPr id="13" name="Oval 12"/>
+          <p:cNvPr id="15" name="Oval 14"/>
           <p:cNvSpPr/>
           <p:nvPr/>
         </p:nvSpPr>
@@ -20842,7 +22832,7 @@
       </p:sp>
       <p:sp>
         <p:nvSpPr>
-          <p:cNvPr id="14" name="TextBox 13"/>
+          <p:cNvPr id="16" name="TextBox 15"/>
           <p:cNvSpPr txBox="1"/>
           <p:nvPr/>
         </p:nvSpPr>
@@ -21281,6 +23271,110 @@
         </p:nvSpPr>
         <p:spPr>
           <a:xfrm>
+            <a:off x="411479" y="1444752"/>
+            <a:ext cx="11368735" cy="4800600"/>
+          </a:xfrm>
+          <a:prstGeom prst="roundRect">
+            <a:avLst>
+              <a:gd name="adj" fmla="val 4000"/>
+            </a:avLst>
+          </a:prstGeom>
+          <a:solidFill>
+            <a:srgbClr val="FFFFFF">
+              <a:alpha val="84000"/>
+            </a:srgbClr>
+          </a:solidFill>
+          <a:ln w="19050">
+            <a:solidFill>
+              <a:srgbClr val="FFFFFF"/>
+            </a:solidFill>
+          </a:ln>
+          <a:effectLst>
+            <a:outerShdw blurRad="203200" dist="50800" dir="5400000" algn="t" rotWithShape="0">
+              <a:srgbClr val="1A2340">
+                <a:alpha val="20000"/>
+              </a:srgbClr>
+            </a:outerShdw>
+          </a:effectLst>
+        </p:spPr>
+        <p:style>
+          <a:lnRef idx="1">
+            <a:schemeClr val="accent1"/>
+          </a:lnRef>
+          <a:fillRef idx="3">
+            <a:schemeClr val="accent1"/>
+          </a:fillRef>
+          <a:effectRef idx="2">
+            <a:schemeClr val="accent1"/>
+          </a:effectRef>
+          <a:fontRef idx="minor">
+            <a:schemeClr val="lt1"/>
+          </a:fontRef>
+        </p:style>
+        <p:txBody>
+          <a:bodyPr rtlCol="0" anchor="ctr"/>
+          <a:lstStyle/>
+          <a:p>
+            <a:pPr algn="ctr"/>
+          </a:p>
+        </p:txBody>
+      </p:sp>
+      <p:sp>
+        <p:nvSpPr>
+          <p:cNvPr id="12" name="Rounded Rectangle 11"/>
+          <p:cNvSpPr/>
+          <p:nvPr/>
+        </p:nvSpPr>
+        <p:spPr>
+          <a:xfrm>
+            <a:off x="731519" y="1508760"/>
+            <a:ext cx="10728655" cy="32004"/>
+          </a:xfrm>
+          <a:prstGeom prst="roundRect">
+            <a:avLst>
+              <a:gd name="adj" fmla="val 50000"/>
+            </a:avLst>
+          </a:prstGeom>
+          <a:solidFill>
+            <a:srgbClr val="FFFFFF">
+              <a:alpha val="85000"/>
+            </a:srgbClr>
+          </a:solidFill>
+          <a:ln>
+            <a:noFill/>
+          </a:ln>
+          <a:effectLst/>
+        </p:spPr>
+        <p:style>
+          <a:lnRef idx="1">
+            <a:schemeClr val="accent1"/>
+          </a:lnRef>
+          <a:fillRef idx="3">
+            <a:schemeClr val="accent1"/>
+          </a:fillRef>
+          <a:effectRef idx="2">
+            <a:schemeClr val="accent1"/>
+          </a:effectRef>
+          <a:fontRef idx="minor">
+            <a:schemeClr val="lt1"/>
+          </a:fontRef>
+        </p:style>
+        <p:txBody>
+          <a:bodyPr rtlCol="0" anchor="ctr"/>
+          <a:lstStyle/>
+          <a:p>
+            <a:pPr algn="ctr"/>
+          </a:p>
+        </p:txBody>
+      </p:sp>
+      <p:sp>
+        <p:nvSpPr>
+          <p:cNvPr id="13" name="Rounded Rectangle 12"/>
+          <p:cNvSpPr/>
+          <p:nvPr/>
+        </p:nvSpPr>
+        <p:spPr>
+          <a:xfrm>
             <a:off x="1645919" y="2103120"/>
             <a:ext cx="8899855" cy="2377440"/>
           </a:xfrm>
@@ -21331,7 +23425,7 @@
       </p:sp>
       <p:sp>
         <p:nvSpPr>
-          <p:cNvPr id="12" name="Rounded Rectangle 11"/>
+          <p:cNvPr id="14" name="Rounded Rectangle 13"/>
           <p:cNvSpPr/>
           <p:nvPr/>
         </p:nvSpPr>
@@ -21379,7 +23473,7 @@
       </p:sp>
       <p:sp>
         <p:nvSpPr>
-          <p:cNvPr id="13" name="Rounded Rectangle 12"/>
+          <p:cNvPr id="15" name="Rounded Rectangle 14"/>
           <p:cNvSpPr/>
           <p:nvPr/>
         </p:nvSpPr>
@@ -21447,7 +23541,7 @@
       </p:sp>
       <p:sp>
         <p:nvSpPr>
-          <p:cNvPr id="14" name="TextBox 13"/>
+          <p:cNvPr id="16" name="TextBox 15"/>
           <p:cNvSpPr txBox="1"/>
           <p:nvPr/>
         </p:nvSpPr>
@@ -21867,14 +23961,177 @@
       </p:pic>
       <p:sp>
         <p:nvSpPr>
-          <p:cNvPr id="11" name="TextBox 10"/>
+          <p:cNvPr id="11" name="Rounded Rectangle 10"/>
+          <p:cNvSpPr/>
+          <p:nvPr/>
+        </p:nvSpPr>
+        <p:spPr>
+          <a:xfrm>
+            <a:off x="411479" y="1444752"/>
+            <a:ext cx="11368735" cy="4800600"/>
+          </a:xfrm>
+          <a:prstGeom prst="roundRect">
+            <a:avLst>
+              <a:gd name="adj" fmla="val 4000"/>
+            </a:avLst>
+          </a:prstGeom>
+          <a:solidFill>
+            <a:srgbClr val="FFFFFF">
+              <a:alpha val="84000"/>
+            </a:srgbClr>
+          </a:solidFill>
+          <a:ln w="19050">
+            <a:solidFill>
+              <a:srgbClr val="FFFFFF"/>
+            </a:solidFill>
+          </a:ln>
+          <a:effectLst>
+            <a:outerShdw blurRad="203200" dist="50800" dir="5400000" algn="t" rotWithShape="0">
+              <a:srgbClr val="1A2340">
+                <a:alpha val="20000"/>
+              </a:srgbClr>
+            </a:outerShdw>
+          </a:effectLst>
+        </p:spPr>
+        <p:style>
+          <a:lnRef idx="1">
+            <a:schemeClr val="accent1"/>
+          </a:lnRef>
+          <a:fillRef idx="3">
+            <a:schemeClr val="accent1"/>
+          </a:fillRef>
+          <a:effectRef idx="2">
+            <a:schemeClr val="accent1"/>
+          </a:effectRef>
+          <a:fontRef idx="minor">
+            <a:schemeClr val="lt1"/>
+          </a:fontRef>
+        </p:style>
+        <p:txBody>
+          <a:bodyPr rtlCol="0" anchor="ctr"/>
+          <a:lstStyle/>
+          <a:p>
+            <a:pPr algn="ctr"/>
+          </a:p>
+        </p:txBody>
+      </p:sp>
+      <p:sp>
+        <p:nvSpPr>
+          <p:cNvPr id="12" name="Rounded Rectangle 11"/>
+          <p:cNvSpPr/>
+          <p:nvPr/>
+        </p:nvSpPr>
+        <p:spPr>
+          <a:xfrm>
+            <a:off x="731519" y="1508760"/>
+            <a:ext cx="10728655" cy="32004"/>
+          </a:xfrm>
+          <a:prstGeom prst="roundRect">
+            <a:avLst>
+              <a:gd name="adj" fmla="val 50000"/>
+            </a:avLst>
+          </a:prstGeom>
+          <a:solidFill>
+            <a:srgbClr val="FFFFFF">
+              <a:alpha val="85000"/>
+            </a:srgbClr>
+          </a:solidFill>
+          <a:ln>
+            <a:noFill/>
+          </a:ln>
+          <a:effectLst/>
+        </p:spPr>
+        <p:style>
+          <a:lnRef idx="1">
+            <a:schemeClr val="accent1"/>
+          </a:lnRef>
+          <a:fillRef idx="3">
+            <a:schemeClr val="accent1"/>
+          </a:fillRef>
+          <a:effectRef idx="2">
+            <a:schemeClr val="accent1"/>
+          </a:effectRef>
+          <a:fontRef idx="minor">
+            <a:schemeClr val="lt1"/>
+          </a:fontRef>
+        </p:style>
+        <p:txBody>
+          <a:bodyPr rtlCol="0" anchor="ctr"/>
+          <a:lstStyle/>
+          <a:p>
+            <a:pPr algn="ctr"/>
+          </a:p>
+        </p:txBody>
+      </p:sp>
+      <p:sp>
+        <p:nvSpPr>
+          <p:cNvPr id="13" name="Rounded Rectangle 12"/>
+          <p:cNvSpPr/>
+          <p:nvPr/>
+        </p:nvSpPr>
+        <p:spPr>
+          <a:xfrm>
+            <a:off x="548640" y="1591056"/>
+            <a:ext cx="64008" cy="1019555"/>
+          </a:xfrm>
+          <a:prstGeom prst="roundRect">
+            <a:avLst>
+              <a:gd name="adj" fmla="val 50000"/>
+            </a:avLst>
+          </a:prstGeom>
+          <a:solidFill>
+            <a:srgbClr val="8D6A2A"/>
+          </a:solidFill>
+          <a:ln>
+            <a:noFill/>
+          </a:ln>
+          <a:effectLst>
+            <a:outerShdw blurRad="203200" dist="50800" dir="5400000" algn="t" rotWithShape="0">
+              <a:srgbClr val="1A2340">
+                <a:alpha val="20000"/>
+              </a:srgbClr>
+            </a:outerShdw>
+          </a:effectLst>
+          <a:scene3d>
+            <a:camera prst="orthographicFront"/>
+            <a:lightRig rig="threePt" dir="t"/>
+          </a:scene3d>
+          <a:sp3d>
+            <a:bevelT w="44450" h="25400" prst="softRound"/>
+          </a:sp3d>
+        </p:spPr>
+        <p:style>
+          <a:lnRef idx="1">
+            <a:schemeClr val="accent1"/>
+          </a:lnRef>
+          <a:fillRef idx="3">
+            <a:schemeClr val="accent1"/>
+          </a:fillRef>
+          <a:effectRef idx="2">
+            <a:schemeClr val="accent1"/>
+          </a:effectRef>
+          <a:fontRef idx="minor">
+            <a:schemeClr val="lt1"/>
+          </a:fontRef>
+        </p:style>
+        <p:txBody>
+          <a:bodyPr rtlCol="0" anchor="ctr"/>
+          <a:lstStyle/>
+          <a:p>
+            <a:pPr algn="ctr"/>
+          </a:p>
+        </p:txBody>
+      </p:sp>
+      <p:sp>
+        <p:nvSpPr>
+          <p:cNvPr id="14" name="TextBox 13"/>
           <p:cNvSpPr txBox="1"/>
           <p:nvPr/>
         </p:nvSpPr>
         <p:spPr>
           <a:xfrm>
-            <a:off x="548640" y="1554480"/>
-            <a:ext cx="11094415" cy="1202436"/>
+            <a:off x="777240" y="1554480"/>
+            <a:ext cx="10865815" cy="1202436"/>
           </a:xfrm>
           <a:prstGeom prst="rect">
             <a:avLst/>
@@ -21922,7 +24179,7 @@
       </p:sp>
       <p:sp>
         <p:nvSpPr>
-          <p:cNvPr id="12" name="Oval 11"/>
+          <p:cNvPr id="15" name="Oval 14"/>
           <p:cNvSpPr/>
           <p:nvPr/>
         </p:nvSpPr>
@@ -21975,7 +24232,7 @@
       </p:sp>
       <p:sp>
         <p:nvSpPr>
-          <p:cNvPr id="13" name="TextBox 12"/>
+          <p:cNvPr id="16" name="TextBox 15"/>
           <p:cNvSpPr txBox="1"/>
           <p:nvPr/>
         </p:nvSpPr>
@@ -22018,7 +24275,7 @@
       </p:sp>
       <p:sp>
         <p:nvSpPr>
-          <p:cNvPr id="14" name="Oval 13"/>
+          <p:cNvPr id="17" name="Oval 16"/>
           <p:cNvSpPr/>
           <p:nvPr/>
         </p:nvSpPr>
@@ -22071,7 +24328,7 @@
       </p:sp>
       <p:sp>
         <p:nvSpPr>
-          <p:cNvPr id="15" name="TextBox 14"/>
+          <p:cNvPr id="18" name="TextBox 17"/>
           <p:cNvSpPr txBox="1"/>
           <p:nvPr/>
         </p:nvSpPr>
@@ -22493,9 +24750,167 @@
           </a:prstGeom>
         </p:spPr>
       </p:pic>
+      <p:sp>
+        <p:nvSpPr>
+          <p:cNvPr id="11" name="Rounded Rectangle 10"/>
+          <p:cNvSpPr/>
+          <p:nvPr/>
+        </p:nvSpPr>
+        <p:spPr>
+          <a:xfrm>
+            <a:off x="411479" y="1444752"/>
+            <a:ext cx="11368735" cy="4800600"/>
+          </a:xfrm>
+          <a:prstGeom prst="roundRect">
+            <a:avLst>
+              <a:gd name="adj" fmla="val 4000"/>
+            </a:avLst>
+          </a:prstGeom>
+          <a:solidFill>
+            <a:srgbClr val="FFFFFF">
+              <a:alpha val="84000"/>
+            </a:srgbClr>
+          </a:solidFill>
+          <a:ln w="19050">
+            <a:solidFill>
+              <a:srgbClr val="FFFFFF"/>
+            </a:solidFill>
+          </a:ln>
+          <a:effectLst>
+            <a:outerShdw blurRad="203200" dist="50800" dir="5400000" algn="t" rotWithShape="0">
+              <a:srgbClr val="1A2340">
+                <a:alpha val="20000"/>
+              </a:srgbClr>
+            </a:outerShdw>
+          </a:effectLst>
+        </p:spPr>
+        <p:style>
+          <a:lnRef idx="1">
+            <a:schemeClr val="accent1"/>
+          </a:lnRef>
+          <a:fillRef idx="3">
+            <a:schemeClr val="accent1"/>
+          </a:fillRef>
+          <a:effectRef idx="2">
+            <a:schemeClr val="accent1"/>
+          </a:effectRef>
+          <a:fontRef idx="minor">
+            <a:schemeClr val="lt1"/>
+          </a:fontRef>
+        </p:style>
+        <p:txBody>
+          <a:bodyPr rtlCol="0" anchor="ctr"/>
+          <a:lstStyle/>
+          <a:p>
+            <a:pPr algn="ctr"/>
+          </a:p>
+        </p:txBody>
+      </p:sp>
+      <p:sp>
+        <p:nvSpPr>
+          <p:cNvPr id="12" name="Rounded Rectangle 11"/>
+          <p:cNvSpPr/>
+          <p:nvPr/>
+        </p:nvSpPr>
+        <p:spPr>
+          <a:xfrm>
+            <a:off x="731519" y="1508760"/>
+            <a:ext cx="10728655" cy="32004"/>
+          </a:xfrm>
+          <a:prstGeom prst="roundRect">
+            <a:avLst>
+              <a:gd name="adj" fmla="val 50000"/>
+            </a:avLst>
+          </a:prstGeom>
+          <a:solidFill>
+            <a:srgbClr val="FFFFFF">
+              <a:alpha val="85000"/>
+            </a:srgbClr>
+          </a:solidFill>
+          <a:ln>
+            <a:noFill/>
+          </a:ln>
+          <a:effectLst/>
+        </p:spPr>
+        <p:style>
+          <a:lnRef idx="1">
+            <a:schemeClr val="accent1"/>
+          </a:lnRef>
+          <a:fillRef idx="3">
+            <a:schemeClr val="accent1"/>
+          </a:fillRef>
+          <a:effectRef idx="2">
+            <a:schemeClr val="accent1"/>
+          </a:effectRef>
+          <a:fontRef idx="minor">
+            <a:schemeClr val="lt1"/>
+          </a:fontRef>
+        </p:style>
+        <p:txBody>
+          <a:bodyPr rtlCol="0" anchor="ctr"/>
+          <a:lstStyle/>
+          <a:p>
+            <a:pPr algn="ctr"/>
+          </a:p>
+        </p:txBody>
+      </p:sp>
+      <p:sp>
+        <p:nvSpPr>
+          <p:cNvPr id="13" name="Rounded Rectangle 12"/>
+          <p:cNvSpPr/>
+          <p:nvPr/>
+        </p:nvSpPr>
+        <p:spPr>
+          <a:xfrm>
+            <a:off x="548640" y="1554480"/>
+            <a:ext cx="11094415" cy="4617720"/>
+          </a:xfrm>
+          <a:prstGeom prst="roundRect">
+            <a:avLst>
+              <a:gd name="adj" fmla="val 3000"/>
+            </a:avLst>
+          </a:prstGeom>
+          <a:solidFill>
+            <a:srgbClr val="FFFFFF"/>
+          </a:solidFill>
+          <a:ln w="9525">
+            <a:solidFill>
+              <a:srgbClr val="DDDFEE"/>
+            </a:solidFill>
+          </a:ln>
+          <a:effectLst>
+            <a:outerShdw blurRad="203200" dist="50800" dir="5400000" algn="t" rotWithShape="0">
+              <a:srgbClr val="1A2340">
+                <a:alpha val="20000"/>
+              </a:srgbClr>
+            </a:outerShdw>
+          </a:effectLst>
+        </p:spPr>
+        <p:style>
+          <a:lnRef idx="1">
+            <a:schemeClr val="accent1"/>
+          </a:lnRef>
+          <a:fillRef idx="3">
+            <a:schemeClr val="accent1"/>
+          </a:fillRef>
+          <a:effectRef idx="2">
+            <a:schemeClr val="accent1"/>
+          </a:effectRef>
+          <a:fontRef idx="minor">
+            <a:schemeClr val="lt1"/>
+          </a:fontRef>
+        </p:style>
+        <p:txBody>
+          <a:bodyPr rtlCol="0" anchor="ctr"/>
+          <a:lstStyle/>
+          <a:p>
+            <a:pPr algn="ctr"/>
+          </a:p>
+        </p:txBody>
+      </p:sp>
       <p:pic>
         <p:nvPicPr>
-          <p:cNvPr id="11" name="Picture 10" descr="Presynaptic neuron with MAO blocked by MAO inhibitors, SERT and NET blocked by SSRIs, SNRIs and TCAs, and the alpha-2 autoreceptor blocked by mirtazapine. A side note links alpha-1, H1 and muscarinic block to adverse effects."/>
+          <p:cNvPr id="14" name="Picture 13" descr="Presynaptic neuron with MAO blocked by MAO inhibitors, SERT and NET blocked by SSRIs, SNRIs and TCAs, and the alpha-2 autoreceptor blocked by mirtazapine. A side note links alpha-1, H1 and muscarinic block to adverse effects."/>
           <p:cNvPicPr>
             <a:picLocks noChangeAspect="1"/>
           </p:cNvPicPr>
@@ -22509,8 +24924,8 @@
         </p:blipFill>
         <p:spPr>
           <a:xfrm>
-            <a:off x="1842757" y="1554480"/>
-            <a:ext cx="8506180" cy="4160520"/>
+            <a:off x="2029708" y="1664207"/>
+            <a:ext cx="8132279" cy="3977639"/>
           </a:xfrm>
           <a:prstGeom prst="rect">
             <a:avLst/>
@@ -22519,14 +24934,14 @@
       </p:pic>
       <p:sp>
         <p:nvSpPr>
-          <p:cNvPr id="12" name="TextBox 11"/>
+          <p:cNvPr id="15" name="TextBox 14"/>
           <p:cNvSpPr txBox="1"/>
           <p:nvPr/>
         </p:nvSpPr>
         <p:spPr>
           <a:xfrm>
-            <a:off x="548640" y="5806440"/>
-            <a:ext cx="11094415" cy="365760"/>
+            <a:off x="685800" y="5733287"/>
+            <a:ext cx="10820095" cy="365760"/>
           </a:xfrm>
           <a:prstGeom prst="rect">
             <a:avLst/>
@@ -22933,9 +25348,113 @@
           </a:prstGeom>
         </p:spPr>
       </p:pic>
+      <p:sp>
+        <p:nvSpPr>
+          <p:cNvPr id="11" name="Rounded Rectangle 10"/>
+          <p:cNvSpPr/>
+          <p:nvPr/>
+        </p:nvSpPr>
+        <p:spPr>
+          <a:xfrm>
+            <a:off x="411479" y="1444752"/>
+            <a:ext cx="11368735" cy="4800600"/>
+          </a:xfrm>
+          <a:prstGeom prst="roundRect">
+            <a:avLst>
+              <a:gd name="adj" fmla="val 4000"/>
+            </a:avLst>
+          </a:prstGeom>
+          <a:solidFill>
+            <a:srgbClr val="FFFFFF">
+              <a:alpha val="84000"/>
+            </a:srgbClr>
+          </a:solidFill>
+          <a:ln w="19050">
+            <a:solidFill>
+              <a:srgbClr val="FFFFFF"/>
+            </a:solidFill>
+          </a:ln>
+          <a:effectLst>
+            <a:outerShdw blurRad="203200" dist="50800" dir="5400000" algn="t" rotWithShape="0">
+              <a:srgbClr val="1A2340">
+                <a:alpha val="20000"/>
+              </a:srgbClr>
+            </a:outerShdw>
+          </a:effectLst>
+        </p:spPr>
+        <p:style>
+          <a:lnRef idx="1">
+            <a:schemeClr val="accent1"/>
+          </a:lnRef>
+          <a:fillRef idx="3">
+            <a:schemeClr val="accent1"/>
+          </a:fillRef>
+          <a:effectRef idx="2">
+            <a:schemeClr val="accent1"/>
+          </a:effectRef>
+          <a:fontRef idx="minor">
+            <a:schemeClr val="lt1"/>
+          </a:fontRef>
+        </p:style>
+        <p:txBody>
+          <a:bodyPr rtlCol="0" anchor="ctr"/>
+          <a:lstStyle/>
+          <a:p>
+            <a:pPr algn="ctr"/>
+          </a:p>
+        </p:txBody>
+      </p:sp>
+      <p:sp>
+        <p:nvSpPr>
+          <p:cNvPr id="12" name="Rounded Rectangle 11"/>
+          <p:cNvSpPr/>
+          <p:nvPr/>
+        </p:nvSpPr>
+        <p:spPr>
+          <a:xfrm>
+            <a:off x="731519" y="1508760"/>
+            <a:ext cx="10728655" cy="32004"/>
+          </a:xfrm>
+          <a:prstGeom prst="roundRect">
+            <a:avLst>
+              <a:gd name="adj" fmla="val 50000"/>
+            </a:avLst>
+          </a:prstGeom>
+          <a:solidFill>
+            <a:srgbClr val="FFFFFF">
+              <a:alpha val="85000"/>
+            </a:srgbClr>
+          </a:solidFill>
+          <a:ln>
+            <a:noFill/>
+          </a:ln>
+          <a:effectLst/>
+        </p:spPr>
+        <p:style>
+          <a:lnRef idx="1">
+            <a:schemeClr val="accent1"/>
+          </a:lnRef>
+          <a:fillRef idx="3">
+            <a:schemeClr val="accent1"/>
+          </a:fillRef>
+          <a:effectRef idx="2">
+            <a:schemeClr val="accent1"/>
+          </a:effectRef>
+          <a:fontRef idx="minor">
+            <a:schemeClr val="lt1"/>
+          </a:fontRef>
+        </p:style>
+        <p:txBody>
+          <a:bodyPr rtlCol="0" anchor="ctr"/>
+          <a:lstStyle/>
+          <a:p>
+            <a:pPr algn="ctr"/>
+          </a:p>
+        </p:txBody>
+      </p:sp>
       <p:graphicFrame>
         <p:nvGraphicFramePr>
-          <p:cNvPr id="11" name="Table 10"/>
+          <p:cNvPr id="13" name="Table 12"/>
           <p:cNvGraphicFramePr>
             <a:graphicFrameLocks noGrp="1"/>
           </p:cNvGraphicFramePr>
@@ -23887,14 +26406,177 @@
       </p:pic>
       <p:sp>
         <p:nvSpPr>
-          <p:cNvPr id="11" name="TextBox 10"/>
+          <p:cNvPr id="11" name="Rounded Rectangle 10"/>
+          <p:cNvSpPr/>
+          <p:nvPr/>
+        </p:nvSpPr>
+        <p:spPr>
+          <a:xfrm>
+            <a:off x="411479" y="1444752"/>
+            <a:ext cx="11368735" cy="4800600"/>
+          </a:xfrm>
+          <a:prstGeom prst="roundRect">
+            <a:avLst>
+              <a:gd name="adj" fmla="val 4000"/>
+            </a:avLst>
+          </a:prstGeom>
+          <a:solidFill>
+            <a:srgbClr val="FFFFFF">
+              <a:alpha val="84000"/>
+            </a:srgbClr>
+          </a:solidFill>
+          <a:ln w="19050">
+            <a:solidFill>
+              <a:srgbClr val="FFFFFF"/>
+            </a:solidFill>
+          </a:ln>
+          <a:effectLst>
+            <a:outerShdw blurRad="203200" dist="50800" dir="5400000" algn="t" rotWithShape="0">
+              <a:srgbClr val="1A2340">
+                <a:alpha val="20000"/>
+              </a:srgbClr>
+            </a:outerShdw>
+          </a:effectLst>
+        </p:spPr>
+        <p:style>
+          <a:lnRef idx="1">
+            <a:schemeClr val="accent1"/>
+          </a:lnRef>
+          <a:fillRef idx="3">
+            <a:schemeClr val="accent1"/>
+          </a:fillRef>
+          <a:effectRef idx="2">
+            <a:schemeClr val="accent1"/>
+          </a:effectRef>
+          <a:fontRef idx="minor">
+            <a:schemeClr val="lt1"/>
+          </a:fontRef>
+        </p:style>
+        <p:txBody>
+          <a:bodyPr rtlCol="0" anchor="ctr"/>
+          <a:lstStyle/>
+          <a:p>
+            <a:pPr algn="ctr"/>
+          </a:p>
+        </p:txBody>
+      </p:sp>
+      <p:sp>
+        <p:nvSpPr>
+          <p:cNvPr id="12" name="Rounded Rectangle 11"/>
+          <p:cNvSpPr/>
+          <p:nvPr/>
+        </p:nvSpPr>
+        <p:spPr>
+          <a:xfrm>
+            <a:off x="731519" y="1508760"/>
+            <a:ext cx="10728655" cy="32004"/>
+          </a:xfrm>
+          <a:prstGeom prst="roundRect">
+            <a:avLst>
+              <a:gd name="adj" fmla="val 50000"/>
+            </a:avLst>
+          </a:prstGeom>
+          <a:solidFill>
+            <a:srgbClr val="FFFFFF">
+              <a:alpha val="85000"/>
+            </a:srgbClr>
+          </a:solidFill>
+          <a:ln>
+            <a:noFill/>
+          </a:ln>
+          <a:effectLst/>
+        </p:spPr>
+        <p:style>
+          <a:lnRef idx="1">
+            <a:schemeClr val="accent1"/>
+          </a:lnRef>
+          <a:fillRef idx="3">
+            <a:schemeClr val="accent1"/>
+          </a:fillRef>
+          <a:effectRef idx="2">
+            <a:schemeClr val="accent1"/>
+          </a:effectRef>
+          <a:fontRef idx="minor">
+            <a:schemeClr val="lt1"/>
+          </a:fontRef>
+        </p:style>
+        <p:txBody>
+          <a:bodyPr rtlCol="0" anchor="ctr"/>
+          <a:lstStyle/>
+          <a:p>
+            <a:pPr algn="ctr"/>
+          </a:p>
+        </p:txBody>
+      </p:sp>
+      <p:sp>
+        <p:nvSpPr>
+          <p:cNvPr id="13" name="Rounded Rectangle 12"/>
+          <p:cNvSpPr/>
+          <p:nvPr/>
+        </p:nvSpPr>
+        <p:spPr>
+          <a:xfrm>
+            <a:off x="548640" y="1591056"/>
+            <a:ext cx="64008" cy="2290064"/>
+          </a:xfrm>
+          <a:prstGeom prst="roundRect">
+            <a:avLst>
+              <a:gd name="adj" fmla="val 50000"/>
+            </a:avLst>
+          </a:prstGeom>
+          <a:solidFill>
+            <a:srgbClr val="8D6A2A"/>
+          </a:solidFill>
+          <a:ln>
+            <a:noFill/>
+          </a:ln>
+          <a:effectLst>
+            <a:outerShdw blurRad="203200" dist="50800" dir="5400000" algn="t" rotWithShape="0">
+              <a:srgbClr val="1A2340">
+                <a:alpha val="20000"/>
+              </a:srgbClr>
+            </a:outerShdw>
+          </a:effectLst>
+          <a:scene3d>
+            <a:camera prst="orthographicFront"/>
+            <a:lightRig rig="threePt" dir="t"/>
+          </a:scene3d>
+          <a:sp3d>
+            <a:bevelT w="44450" h="25400" prst="softRound"/>
+          </a:sp3d>
+        </p:spPr>
+        <p:style>
+          <a:lnRef idx="1">
+            <a:schemeClr val="accent1"/>
+          </a:lnRef>
+          <a:fillRef idx="3">
+            <a:schemeClr val="accent1"/>
+          </a:fillRef>
+          <a:effectRef idx="2">
+            <a:schemeClr val="accent1"/>
+          </a:effectRef>
+          <a:fontRef idx="minor">
+            <a:schemeClr val="lt1"/>
+          </a:fontRef>
+        </p:style>
+        <p:txBody>
+          <a:bodyPr rtlCol="0" anchor="ctr"/>
+          <a:lstStyle/>
+          <a:p>
+            <a:pPr algn="ctr"/>
+          </a:p>
+        </p:txBody>
+      </p:sp>
+      <p:sp>
+        <p:nvSpPr>
+          <p:cNvPr id="14" name="TextBox 13"/>
           <p:cNvSpPr txBox="1"/>
           <p:nvPr/>
         </p:nvSpPr>
         <p:spPr>
           <a:xfrm>
-            <a:off x="548640" y="1554480"/>
-            <a:ext cx="4480560" cy="4617720"/>
+            <a:off x="777240" y="1554480"/>
+            <a:ext cx="4251960" cy="4617720"/>
           </a:xfrm>
           <a:prstGeom prst="rect">
             <a:avLst/>
@@ -23942,7 +26624,7 @@
       </p:sp>
       <p:sp>
         <p:nvSpPr>
-          <p:cNvPr id="12" name="Oval 11"/>
+          <p:cNvPr id="15" name="Oval 14"/>
           <p:cNvSpPr/>
           <p:nvPr/>
         </p:nvSpPr>
@@ -23995,7 +26677,7 @@
       </p:sp>
       <p:sp>
         <p:nvSpPr>
-          <p:cNvPr id="13" name="TextBox 12"/>
+          <p:cNvPr id="16" name="TextBox 15"/>
           <p:cNvSpPr txBox="1"/>
           <p:nvPr/>
         </p:nvSpPr>
@@ -24038,7 +26720,7 @@
       </p:sp>
       <p:sp>
         <p:nvSpPr>
-          <p:cNvPr id="14" name="Oval 13"/>
+          <p:cNvPr id="17" name="Oval 16"/>
           <p:cNvSpPr/>
           <p:nvPr/>
         </p:nvSpPr>
@@ -24091,7 +26773,7 @@
       </p:sp>
       <p:sp>
         <p:nvSpPr>
-          <p:cNvPr id="15" name="TextBox 14"/>
+          <p:cNvPr id="18" name="TextBox 17"/>
           <p:cNvSpPr txBox="1"/>
           <p:nvPr/>
         </p:nvSpPr>
